--- a/docs/pptx/carbo/ritu-carbo-linsubhr-sens-sideeffect_10pct.pptx
+++ b/docs/pptx/carbo/ritu-carbo-linsubhr-sens-sideeffect_10pct.pptx
@@ -2443,7 +2443,7 @@
           </p:nvSpPr>
           <p:spPr>
             <a:xfrm>
-              <a:off x="1325501" y="2073503"/>
+              <a:off x="1325928" y="2073503"/>
               <a:ext cx="0" cy="3649639"/>
             </a:xfrm>
             <a:custGeom>
@@ -2486,7 +2486,7 @@
           </p:nvSpPr>
           <p:spPr>
             <a:xfrm>
-              <a:off x="2239092" y="2073503"/>
+              <a:off x="2237914" y="2073503"/>
               <a:ext cx="0" cy="3649639"/>
             </a:xfrm>
             <a:custGeom>
@@ -2529,7 +2529,7 @@
           </p:nvSpPr>
           <p:spPr>
             <a:xfrm>
-              <a:off x="3152683" y="2073503"/>
+              <a:off x="3149900" y="2073503"/>
               <a:ext cx="0" cy="3649639"/>
             </a:xfrm>
             <a:custGeom>
@@ -2572,7 +2572,7 @@
           </p:nvSpPr>
           <p:spPr>
             <a:xfrm>
-              <a:off x="4066274" y="2073503"/>
+              <a:off x="4061886" y="2073503"/>
               <a:ext cx="0" cy="3649639"/>
             </a:xfrm>
             <a:custGeom>
@@ -2615,7 +2615,7 @@
           </p:nvSpPr>
           <p:spPr>
             <a:xfrm>
-              <a:off x="4979865" y="2073503"/>
+              <a:off x="4973872" y="2073503"/>
               <a:ext cx="0" cy="3649639"/>
             </a:xfrm>
             <a:custGeom>
@@ -2658,7 +2658,7 @@
           </p:nvSpPr>
           <p:spPr>
             <a:xfrm>
-              <a:off x="5893456" y="2073503"/>
+              <a:off x="5885859" y="2073503"/>
               <a:ext cx="0" cy="3649639"/>
             </a:xfrm>
             <a:custGeom>
@@ -2701,7 +2701,7 @@
           </p:nvSpPr>
           <p:spPr>
             <a:xfrm>
-              <a:off x="6807046" y="2073503"/>
+              <a:off x="6797845" y="2073503"/>
               <a:ext cx="0" cy="3649639"/>
             </a:xfrm>
             <a:custGeom>
@@ -2744,7 +2744,7 @@
           </p:nvSpPr>
           <p:spPr>
             <a:xfrm>
-              <a:off x="7720637" y="2073503"/>
+              <a:off x="7709831" y="2073503"/>
               <a:ext cx="0" cy="3649639"/>
             </a:xfrm>
             <a:custGeom>
@@ -3002,7 +3002,7 @@
           </p:nvSpPr>
           <p:spPr>
             <a:xfrm>
-              <a:off x="868706" y="2073503"/>
+              <a:off x="869934" y="2073503"/>
               <a:ext cx="0" cy="3649639"/>
             </a:xfrm>
             <a:custGeom>
@@ -3045,7 +3045,7 @@
           </p:nvSpPr>
           <p:spPr>
             <a:xfrm>
-              <a:off x="1782297" y="2073503"/>
+              <a:off x="1781921" y="2073503"/>
               <a:ext cx="0" cy="3649639"/>
             </a:xfrm>
             <a:custGeom>
@@ -3088,7 +3088,7 @@
           </p:nvSpPr>
           <p:spPr>
             <a:xfrm>
-              <a:off x="2695888" y="2073503"/>
+              <a:off x="2693907" y="2073503"/>
               <a:ext cx="0" cy="3649639"/>
             </a:xfrm>
             <a:custGeom>
@@ -3131,7 +3131,7 @@
           </p:nvSpPr>
           <p:spPr>
             <a:xfrm>
-              <a:off x="3609478" y="2073503"/>
+              <a:off x="3605893" y="2073503"/>
               <a:ext cx="0" cy="3649639"/>
             </a:xfrm>
             <a:custGeom>
@@ -3174,7 +3174,7 @@
           </p:nvSpPr>
           <p:spPr>
             <a:xfrm>
-              <a:off x="4523069" y="2073503"/>
+              <a:off x="4517879" y="2073503"/>
               <a:ext cx="0" cy="3649639"/>
             </a:xfrm>
             <a:custGeom>
@@ -3217,7 +3217,7 @@
           </p:nvSpPr>
           <p:spPr>
             <a:xfrm>
-              <a:off x="5436660" y="2073503"/>
+              <a:off x="5429866" y="2073503"/>
               <a:ext cx="0" cy="3649639"/>
             </a:xfrm>
             <a:custGeom>
@@ -3260,7 +3260,7 @@
           </p:nvSpPr>
           <p:spPr>
             <a:xfrm>
-              <a:off x="6350251" y="2073503"/>
+              <a:off x="6341852" y="2073503"/>
               <a:ext cx="0" cy="3649639"/>
             </a:xfrm>
             <a:custGeom>
@@ -3303,7 +3303,7 @@
           </p:nvSpPr>
           <p:spPr>
             <a:xfrm>
-              <a:off x="7263842" y="2073503"/>
+              <a:off x="7253838" y="2073503"/>
               <a:ext cx="0" cy="3649639"/>
             </a:xfrm>
             <a:custGeom>
@@ -3346,7 +3346,7 @@
           </p:nvSpPr>
           <p:spPr>
             <a:xfrm>
-              <a:off x="8177433" y="2073503"/>
+              <a:off x="8165824" y="2073503"/>
               <a:ext cx="0" cy="3649639"/>
             </a:xfrm>
             <a:custGeom>
@@ -3390,590 +3390,590 @@
           <p:spPr>
             <a:xfrm>
               <a:off x="1172049" y="2073503"/>
-              <a:ext cx="7090630" cy="3322463"/>
+              <a:ext cx="7090630" cy="3324822"/>
             </a:xfrm>
             <a:custGeom>
               <a:avLst/>
               <a:pathLst>
-                <a:path w="7090630" h="3322463">
+                <a:path w="7090630" h="3324822">
                   <a:moveTo>
-                    <a:pt x="0" y="489596"/>
+                    <a:pt x="0" y="476713"/>
                   </a:moveTo>
                   <a:lnTo>
-                    <a:pt x="71622" y="568091"/>
-                  </a:lnTo>
-                  <a:lnTo>
-                    <a:pt x="143245" y="644528"/>
-                  </a:lnTo>
-                  <a:lnTo>
-                    <a:pt x="214867" y="718961"/>
-                  </a:lnTo>
-                  <a:lnTo>
-                    <a:pt x="286490" y="791442"/>
-                  </a:lnTo>
-                  <a:lnTo>
-                    <a:pt x="358112" y="862024"/>
-                  </a:lnTo>
-                  <a:lnTo>
-                    <a:pt x="429735" y="930755"/>
-                  </a:lnTo>
-                  <a:lnTo>
-                    <a:pt x="501357" y="997684"/>
-                  </a:lnTo>
-                  <a:lnTo>
-                    <a:pt x="572980" y="1062859"/>
-                  </a:lnTo>
-                  <a:lnTo>
-                    <a:pt x="644602" y="1126325"/>
-                  </a:lnTo>
-                  <a:lnTo>
-                    <a:pt x="716225" y="1188127"/>
-                  </a:lnTo>
-                  <a:lnTo>
-                    <a:pt x="787847" y="1248309"/>
-                  </a:lnTo>
-                  <a:lnTo>
-                    <a:pt x="859470" y="1306913"/>
-                  </a:lnTo>
-                  <a:lnTo>
-                    <a:pt x="931092" y="1363981"/>
-                  </a:lnTo>
-                  <a:lnTo>
-                    <a:pt x="1002715" y="1419553"/>
-                  </a:lnTo>
-                  <a:lnTo>
-                    <a:pt x="1074337" y="1473668"/>
-                  </a:lnTo>
-                  <a:lnTo>
-                    <a:pt x="1145960" y="1526364"/>
-                  </a:lnTo>
-                  <a:lnTo>
-                    <a:pt x="1217582" y="1577679"/>
-                  </a:lnTo>
-                  <a:lnTo>
-                    <a:pt x="1289205" y="1627649"/>
-                  </a:lnTo>
-                  <a:lnTo>
-                    <a:pt x="1360827" y="1676308"/>
-                  </a:lnTo>
-                  <a:lnTo>
-                    <a:pt x="1432450" y="1723692"/>
-                  </a:lnTo>
-                  <a:lnTo>
-                    <a:pt x="1504073" y="1769834"/>
-                  </a:lnTo>
-                  <a:lnTo>
-                    <a:pt x="1575695" y="1814766"/>
-                  </a:lnTo>
-                  <a:lnTo>
-                    <a:pt x="1647318" y="1858520"/>
-                  </a:lnTo>
-                  <a:lnTo>
-                    <a:pt x="1718940" y="1901127"/>
-                  </a:lnTo>
-                  <a:lnTo>
-                    <a:pt x="1790563" y="1942617"/>
-                  </a:lnTo>
-                  <a:lnTo>
-                    <a:pt x="1862185" y="1983019"/>
-                  </a:lnTo>
-                  <a:lnTo>
-                    <a:pt x="1933808" y="2022362"/>
-                  </a:lnTo>
-                  <a:lnTo>
-                    <a:pt x="2005430" y="2060674"/>
-                  </a:lnTo>
-                  <a:lnTo>
-                    <a:pt x="2077053" y="2097981"/>
-                  </a:lnTo>
-                  <a:lnTo>
-                    <a:pt x="2148675" y="2134310"/>
-                  </a:lnTo>
-                  <a:lnTo>
-                    <a:pt x="2220298" y="2169687"/>
-                  </a:lnTo>
-                  <a:lnTo>
-                    <a:pt x="2291920" y="2204137"/>
-                  </a:lnTo>
-                  <a:lnTo>
-                    <a:pt x="2363543" y="2237683"/>
-                  </a:lnTo>
-                  <a:lnTo>
-                    <a:pt x="2435165" y="2270350"/>
-                  </a:lnTo>
-                  <a:lnTo>
-                    <a:pt x="2506788" y="2302160"/>
-                  </a:lnTo>
-                  <a:lnTo>
-                    <a:pt x="2578410" y="2333137"/>
-                  </a:lnTo>
-                  <a:lnTo>
-                    <a:pt x="2650033" y="2363301"/>
-                  </a:lnTo>
-                  <a:lnTo>
-                    <a:pt x="2721655" y="2392675"/>
-                  </a:lnTo>
-                  <a:lnTo>
-                    <a:pt x="2793278" y="2421278"/>
-                  </a:lnTo>
-                  <a:lnTo>
-                    <a:pt x="2864901" y="2449132"/>
-                  </a:lnTo>
-                  <a:lnTo>
-                    <a:pt x="2936523" y="2476255"/>
-                  </a:lnTo>
-                  <a:lnTo>
-                    <a:pt x="3008146" y="2502668"/>
-                  </a:lnTo>
-                  <a:lnTo>
-                    <a:pt x="3079768" y="2528388"/>
-                  </a:lnTo>
-                  <a:lnTo>
-                    <a:pt x="3151391" y="2553434"/>
-                  </a:lnTo>
-                  <a:lnTo>
-                    <a:pt x="3223013" y="2577823"/>
-                  </a:lnTo>
-                  <a:lnTo>
-                    <a:pt x="3294636" y="2601572"/>
-                  </a:lnTo>
-                  <a:lnTo>
-                    <a:pt x="3366258" y="2624699"/>
-                  </a:lnTo>
-                  <a:lnTo>
-                    <a:pt x="3437881" y="2647220"/>
-                  </a:lnTo>
-                  <a:lnTo>
-                    <a:pt x="3509503" y="2634920"/>
-                  </a:lnTo>
-                  <a:lnTo>
-                    <a:pt x="3581126" y="2605659"/>
-                  </a:lnTo>
-                  <a:lnTo>
-                    <a:pt x="3652748" y="2575389"/>
-                  </a:lnTo>
-                  <a:lnTo>
-                    <a:pt x="3724371" y="2544076"/>
-                  </a:lnTo>
-                  <a:lnTo>
-                    <a:pt x="3795993" y="2511683"/>
-                  </a:lnTo>
-                  <a:lnTo>
-                    <a:pt x="3867616" y="2478173"/>
-                  </a:lnTo>
-                  <a:lnTo>
-                    <a:pt x="3939238" y="2443509"/>
-                  </a:lnTo>
-                  <a:lnTo>
-                    <a:pt x="4010861" y="2407649"/>
-                  </a:lnTo>
-                  <a:lnTo>
-                    <a:pt x="4082483" y="2370553"/>
-                  </a:lnTo>
-                  <a:lnTo>
-                    <a:pt x="4154106" y="2332179"/>
-                  </a:lnTo>
-                  <a:lnTo>
-                    <a:pt x="4225729" y="2292481"/>
-                  </a:lnTo>
-                  <a:lnTo>
-                    <a:pt x="4297351" y="2251415"/>
-                  </a:lnTo>
-                  <a:lnTo>
-                    <a:pt x="4368974" y="2208933"/>
-                  </a:lnTo>
-                  <a:lnTo>
-                    <a:pt x="4440596" y="2164987"/>
-                  </a:lnTo>
-                  <a:lnTo>
-                    <a:pt x="4512219" y="2119526"/>
-                  </a:lnTo>
-                  <a:lnTo>
-                    <a:pt x="4583841" y="2072498"/>
-                  </a:lnTo>
-                  <a:lnTo>
-                    <a:pt x="4655464" y="2023849"/>
-                  </a:lnTo>
-                  <a:lnTo>
-                    <a:pt x="4727086" y="1973522"/>
-                  </a:lnTo>
-                  <a:lnTo>
-                    <a:pt x="4798709" y="1921461"/>
-                  </a:lnTo>
-                  <a:lnTo>
-                    <a:pt x="4870331" y="1867605"/>
-                  </a:lnTo>
-                  <a:lnTo>
-                    <a:pt x="4941954" y="1811892"/>
-                  </a:lnTo>
-                  <a:lnTo>
-                    <a:pt x="5013576" y="1754259"/>
-                  </a:lnTo>
-                  <a:lnTo>
-                    <a:pt x="5085199" y="1694640"/>
-                  </a:lnTo>
-                  <a:lnTo>
-                    <a:pt x="5156821" y="1632964"/>
-                  </a:lnTo>
-                  <a:lnTo>
-                    <a:pt x="5228444" y="1569163"/>
-                  </a:lnTo>
-                  <a:lnTo>
-                    <a:pt x="5300066" y="1503163"/>
-                  </a:lnTo>
-                  <a:lnTo>
-                    <a:pt x="5371689" y="1434887"/>
-                  </a:lnTo>
-                  <a:lnTo>
-                    <a:pt x="5443311" y="1364257"/>
-                  </a:lnTo>
-                  <a:lnTo>
-                    <a:pt x="5514934" y="1291193"/>
-                  </a:lnTo>
-                  <a:lnTo>
-                    <a:pt x="5586557" y="1215610"/>
-                  </a:lnTo>
-                  <a:lnTo>
-                    <a:pt x="5658179" y="1137421"/>
-                  </a:lnTo>
-                  <a:lnTo>
-                    <a:pt x="5729802" y="1056538"/>
-                  </a:lnTo>
-                  <a:lnTo>
-                    <a:pt x="5801424" y="972865"/>
-                  </a:lnTo>
-                  <a:lnTo>
-                    <a:pt x="5873047" y="886309"/>
-                  </a:lnTo>
-                  <a:lnTo>
-                    <a:pt x="5944669" y="796769"/>
-                  </a:lnTo>
-                  <a:lnTo>
-                    <a:pt x="6016292" y="704141"/>
-                  </a:lnTo>
-                  <a:lnTo>
-                    <a:pt x="6087914" y="608321"/>
-                  </a:lnTo>
-                  <a:lnTo>
-                    <a:pt x="6159537" y="509198"/>
-                  </a:lnTo>
-                  <a:lnTo>
-                    <a:pt x="6231159" y="406658"/>
-                  </a:lnTo>
-                  <a:lnTo>
-                    <a:pt x="6302782" y="300582"/>
-                  </a:lnTo>
-                  <a:lnTo>
-                    <a:pt x="6374404" y="190851"/>
-                  </a:lnTo>
-                  <a:lnTo>
-                    <a:pt x="6446027" y="77336"/>
-                  </a:lnTo>
-                  <a:lnTo>
-                    <a:pt x="6493197" y="0"/>
+                    <a:pt x="71622" y="555452"/>
+                  </a:lnTo>
+                  <a:lnTo>
+                    <a:pt x="143245" y="632130"/>
+                  </a:lnTo>
+                  <a:lnTo>
+                    <a:pt x="214867" y="706800"/>
+                  </a:lnTo>
+                  <a:lnTo>
+                    <a:pt x="286490" y="779514"/>
+                  </a:lnTo>
+                  <a:lnTo>
+                    <a:pt x="358112" y="850325"/>
+                  </a:lnTo>
+                  <a:lnTo>
+                    <a:pt x="429735" y="919281"/>
+                  </a:lnTo>
+                  <a:lnTo>
+                    <a:pt x="501357" y="986432"/>
+                  </a:lnTo>
+                  <a:lnTo>
+                    <a:pt x="572980" y="1051825"/>
+                  </a:lnTo>
+                  <a:lnTo>
+                    <a:pt x="644602" y="1115505"/>
+                  </a:lnTo>
+                  <a:lnTo>
+                    <a:pt x="716225" y="1177517"/>
+                  </a:lnTo>
+                  <a:lnTo>
+                    <a:pt x="787847" y="1237906"/>
+                  </a:lnTo>
+                  <a:lnTo>
+                    <a:pt x="859470" y="1296714"/>
+                  </a:lnTo>
+                  <a:lnTo>
+                    <a:pt x="931092" y="1353981"/>
+                  </a:lnTo>
+                  <a:lnTo>
+                    <a:pt x="1002715" y="1409750"/>
+                  </a:lnTo>
+                  <a:lnTo>
+                    <a:pt x="1074337" y="1464057"/>
+                  </a:lnTo>
+                  <a:lnTo>
+                    <a:pt x="1145960" y="1516943"/>
+                  </a:lnTo>
+                  <a:lnTo>
+                    <a:pt x="1217582" y="1568444"/>
+                  </a:lnTo>
+                  <a:lnTo>
+                    <a:pt x="1289205" y="1618596"/>
+                  </a:lnTo>
+                  <a:lnTo>
+                    <a:pt x="1360827" y="1667436"/>
+                  </a:lnTo>
+                  <a:lnTo>
+                    <a:pt x="1432450" y="1714996"/>
+                  </a:lnTo>
+                  <a:lnTo>
+                    <a:pt x="1504073" y="1761311"/>
+                  </a:lnTo>
+                  <a:lnTo>
+                    <a:pt x="1575695" y="1806413"/>
+                  </a:lnTo>
+                  <a:lnTo>
+                    <a:pt x="1647318" y="1850334"/>
+                  </a:lnTo>
+                  <a:lnTo>
+                    <a:pt x="1718940" y="1893105"/>
+                  </a:lnTo>
+                  <a:lnTo>
+                    <a:pt x="1790563" y="1934756"/>
+                  </a:lnTo>
+                  <a:lnTo>
+                    <a:pt x="1862185" y="1975317"/>
+                  </a:lnTo>
+                  <a:lnTo>
+                    <a:pt x="1933808" y="2014815"/>
+                  </a:lnTo>
+                  <a:lnTo>
+                    <a:pt x="2005430" y="2053279"/>
+                  </a:lnTo>
+                  <a:lnTo>
+                    <a:pt x="2077053" y="2090736"/>
+                  </a:lnTo>
+                  <a:lnTo>
+                    <a:pt x="2148675" y="2127212"/>
+                  </a:lnTo>
+                  <a:lnTo>
+                    <a:pt x="2220298" y="2162733"/>
+                  </a:lnTo>
+                  <a:lnTo>
+                    <a:pt x="2291920" y="2197324"/>
+                  </a:lnTo>
+                  <a:lnTo>
+                    <a:pt x="2363543" y="2231009"/>
+                  </a:lnTo>
+                  <a:lnTo>
+                    <a:pt x="2435165" y="2263812"/>
+                  </a:lnTo>
+                  <a:lnTo>
+                    <a:pt x="2506788" y="2295756"/>
+                  </a:lnTo>
+                  <a:lnTo>
+                    <a:pt x="2578410" y="2326864"/>
+                  </a:lnTo>
+                  <a:lnTo>
+                    <a:pt x="2650033" y="2357157"/>
+                  </a:lnTo>
+                  <a:lnTo>
+                    <a:pt x="2721655" y="2386657"/>
+                  </a:lnTo>
+                  <a:lnTo>
+                    <a:pt x="2793278" y="2415384"/>
+                  </a:lnTo>
+                  <a:lnTo>
+                    <a:pt x="2864901" y="2443359"/>
+                  </a:lnTo>
+                  <a:lnTo>
+                    <a:pt x="2936523" y="2470602"/>
+                  </a:lnTo>
+                  <a:lnTo>
+                    <a:pt x="3008146" y="2497131"/>
+                  </a:lnTo>
+                  <a:lnTo>
+                    <a:pt x="3079768" y="2522966"/>
+                  </a:lnTo>
+                  <a:lnTo>
+                    <a:pt x="3151391" y="2548124"/>
+                  </a:lnTo>
+                  <a:lnTo>
+                    <a:pt x="3223013" y="2572624"/>
+                  </a:lnTo>
+                  <a:lnTo>
+                    <a:pt x="3294636" y="2596481"/>
+                  </a:lnTo>
+                  <a:lnTo>
+                    <a:pt x="3366258" y="2619714"/>
+                  </a:lnTo>
+                  <a:lnTo>
+                    <a:pt x="3437881" y="2642339"/>
+                  </a:lnTo>
+                  <a:lnTo>
+                    <a:pt x="3509503" y="2641157"/>
+                  </a:lnTo>
+                  <a:lnTo>
+                    <a:pt x="3581126" y="2611980"/>
+                  </a:lnTo>
+                  <a:lnTo>
+                    <a:pt x="3652748" y="2581793"/>
+                  </a:lnTo>
+                  <a:lnTo>
+                    <a:pt x="3724371" y="2550560"/>
+                  </a:lnTo>
+                  <a:lnTo>
+                    <a:pt x="3795993" y="2518246"/>
+                  </a:lnTo>
+                  <a:lnTo>
+                    <a:pt x="3867616" y="2484813"/>
+                  </a:lnTo>
+                  <a:lnTo>
+                    <a:pt x="3939238" y="2450222"/>
+                  </a:lnTo>
+                  <a:lnTo>
+                    <a:pt x="4010861" y="2414433"/>
+                  </a:lnTo>
+                  <a:lnTo>
+                    <a:pt x="4082483" y="2377405"/>
+                  </a:lnTo>
+                  <a:lnTo>
+                    <a:pt x="4154106" y="2339095"/>
+                  </a:lnTo>
+                  <a:lnTo>
+                    <a:pt x="4225729" y="2299458"/>
+                  </a:lnTo>
+                  <a:lnTo>
+                    <a:pt x="4297351" y="2258448"/>
+                  </a:lnTo>
+                  <a:lnTo>
+                    <a:pt x="4368974" y="2216019"/>
+                  </a:lnTo>
+                  <a:lnTo>
+                    <a:pt x="4440596" y="2172120"/>
+                  </a:lnTo>
+                  <a:lnTo>
+                    <a:pt x="4512219" y="2126701"/>
+                  </a:lnTo>
+                  <a:lnTo>
+                    <a:pt x="4583841" y="2079709"/>
+                  </a:lnTo>
+                  <a:lnTo>
+                    <a:pt x="4655464" y="2031091"/>
+                  </a:lnTo>
+                  <a:lnTo>
+                    <a:pt x="4727086" y="1980788"/>
+                  </a:lnTo>
+                  <a:lnTo>
+                    <a:pt x="4798709" y="1928744"/>
+                  </a:lnTo>
+                  <a:lnTo>
+                    <a:pt x="4870331" y="1874898"/>
+                  </a:lnTo>
+                  <a:lnTo>
+                    <a:pt x="4941954" y="1819186"/>
+                  </a:lnTo>
+                  <a:lnTo>
+                    <a:pt x="5013576" y="1761546"/>
+                  </a:lnTo>
+                  <a:lnTo>
+                    <a:pt x="5085199" y="1701910"/>
+                  </a:lnTo>
+                  <a:lnTo>
+                    <a:pt x="5156821" y="1640209"/>
+                  </a:lnTo>
+                  <a:lnTo>
+                    <a:pt x="5228444" y="1576371"/>
+                  </a:lnTo>
+                  <a:lnTo>
+                    <a:pt x="5300066" y="1510323"/>
+                  </a:lnTo>
+                  <a:lnTo>
+                    <a:pt x="5371689" y="1441987"/>
+                  </a:lnTo>
+                  <a:lnTo>
+                    <a:pt x="5443311" y="1371285"/>
+                  </a:lnTo>
+                  <a:lnTo>
+                    <a:pt x="5514934" y="1298135"/>
+                  </a:lnTo>
+                  <a:lnTo>
+                    <a:pt x="5586557" y="1222452"/>
+                  </a:lnTo>
+                  <a:lnTo>
+                    <a:pt x="5658179" y="1144148"/>
+                  </a:lnTo>
+                  <a:lnTo>
+                    <a:pt x="5729802" y="1063133"/>
+                  </a:lnTo>
+                  <a:lnTo>
+                    <a:pt x="5801424" y="979312"/>
+                  </a:lnTo>
+                  <a:lnTo>
+                    <a:pt x="5873047" y="892589"/>
+                  </a:lnTo>
+                  <a:lnTo>
+                    <a:pt x="5944669" y="802863"/>
+                  </a:lnTo>
+                  <a:lnTo>
+                    <a:pt x="6016292" y="710029"/>
+                  </a:lnTo>
+                  <a:lnTo>
+                    <a:pt x="6087914" y="613981"/>
+                  </a:lnTo>
+                  <a:lnTo>
+                    <a:pt x="6159537" y="514607"/>
+                  </a:lnTo>
+                  <a:lnTo>
+                    <a:pt x="6231159" y="411792"/>
+                  </a:lnTo>
+                  <a:lnTo>
+                    <a:pt x="6302782" y="305417"/>
+                  </a:lnTo>
+                  <a:lnTo>
+                    <a:pt x="6374404" y="195358"/>
+                  </a:lnTo>
+                  <a:lnTo>
+                    <a:pt x="6446027" y="81488"/>
+                  </a:lnTo>
+                  <a:lnTo>
+                    <a:pt x="6495567" y="0"/>
                   </a:lnTo>
                   <a:lnTo>
                     <a:pt x="7090630" y="0"/>
                   </a:lnTo>
                   <a:lnTo>
-                    <a:pt x="7090630" y="3267936"/>
-                  </a:lnTo>
-                  <a:lnTo>
-                    <a:pt x="7019007" y="3262126"/>
-                  </a:lnTo>
-                  <a:lnTo>
-                    <a:pt x="6947385" y="3256159"/>
-                  </a:lnTo>
-                  <a:lnTo>
-                    <a:pt x="6875762" y="3250032"/>
-                  </a:lnTo>
-                  <a:lnTo>
-                    <a:pt x="6804139" y="3243740"/>
-                  </a:lnTo>
-                  <a:lnTo>
-                    <a:pt x="6732517" y="3237279"/>
-                  </a:lnTo>
-                  <a:lnTo>
-                    <a:pt x="6660894" y="3230643"/>
-                  </a:lnTo>
-                  <a:lnTo>
-                    <a:pt x="6589272" y="3223829"/>
-                  </a:lnTo>
-                  <a:lnTo>
-                    <a:pt x="6517649" y="3216832"/>
-                  </a:lnTo>
-                  <a:lnTo>
-                    <a:pt x="6446027" y="3209646"/>
-                  </a:lnTo>
-                  <a:lnTo>
-                    <a:pt x="6374404" y="3202267"/>
-                  </a:lnTo>
-                  <a:lnTo>
-                    <a:pt x="6302782" y="3194689"/>
-                  </a:lnTo>
-                  <a:lnTo>
-                    <a:pt x="6231159" y="3186907"/>
-                  </a:lnTo>
-                  <a:lnTo>
-                    <a:pt x="6159537" y="3178915"/>
-                  </a:lnTo>
-                  <a:lnTo>
-                    <a:pt x="6087914" y="3170709"/>
-                  </a:lnTo>
-                  <a:lnTo>
-                    <a:pt x="6016292" y="3162281"/>
-                  </a:lnTo>
-                  <a:lnTo>
-                    <a:pt x="5944669" y="3153627"/>
-                  </a:lnTo>
-                  <a:lnTo>
-                    <a:pt x="5873047" y="3144739"/>
-                  </a:lnTo>
-                  <a:lnTo>
-                    <a:pt x="5801424" y="3135613"/>
-                  </a:lnTo>
-                  <a:lnTo>
-                    <a:pt x="5729802" y="3126240"/>
-                  </a:lnTo>
-                  <a:lnTo>
-                    <a:pt x="5658179" y="3116616"/>
-                  </a:lnTo>
-                  <a:lnTo>
-                    <a:pt x="5586557" y="3106732"/>
-                  </a:lnTo>
-                  <a:lnTo>
-                    <a:pt x="5514934" y="3096582"/>
-                  </a:lnTo>
-                  <a:lnTo>
-                    <a:pt x="5443311" y="3086159"/>
-                  </a:lnTo>
-                  <a:lnTo>
-                    <a:pt x="5371689" y="3075455"/>
-                  </a:lnTo>
-                  <a:lnTo>
-                    <a:pt x="5300066" y="3064463"/>
-                  </a:lnTo>
-                  <a:lnTo>
-                    <a:pt x="5228444" y="3053175"/>
-                  </a:lnTo>
-                  <a:lnTo>
-                    <a:pt x="5156821" y="3041583"/>
-                  </a:lnTo>
-                  <a:lnTo>
-                    <a:pt x="5085199" y="3029680"/>
-                  </a:lnTo>
-                  <a:lnTo>
-                    <a:pt x="5013576" y="3017455"/>
-                  </a:lnTo>
-                  <a:lnTo>
-                    <a:pt x="4941954" y="3004902"/>
-                  </a:lnTo>
-                  <a:lnTo>
-                    <a:pt x="4870331" y="2992010"/>
-                  </a:lnTo>
-                  <a:lnTo>
-                    <a:pt x="4798709" y="2978772"/>
-                  </a:lnTo>
-                  <a:lnTo>
-                    <a:pt x="4727086" y="2965177"/>
-                  </a:lnTo>
-                  <a:lnTo>
-                    <a:pt x="4655464" y="2951216"/>
-                  </a:lnTo>
-                  <a:lnTo>
-                    <a:pt x="4583841" y="2936880"/>
-                  </a:lnTo>
-                  <a:lnTo>
-                    <a:pt x="4512219" y="2922157"/>
-                  </a:lnTo>
-                  <a:lnTo>
-                    <a:pt x="4440596" y="2907038"/>
-                  </a:lnTo>
-                  <a:lnTo>
-                    <a:pt x="4368974" y="2891512"/>
-                  </a:lnTo>
-                  <a:lnTo>
-                    <a:pt x="4297351" y="2875568"/>
-                  </a:lnTo>
-                  <a:lnTo>
-                    <a:pt x="4225729" y="2859195"/>
-                  </a:lnTo>
-                  <a:lnTo>
-                    <a:pt x="4154106" y="2842381"/>
-                  </a:lnTo>
-                  <a:lnTo>
-                    <a:pt x="4082483" y="2825114"/>
-                  </a:lnTo>
-                  <a:lnTo>
-                    <a:pt x="4010861" y="2807382"/>
-                  </a:lnTo>
-                  <a:lnTo>
-                    <a:pt x="3939238" y="2789173"/>
-                  </a:lnTo>
-                  <a:lnTo>
-                    <a:pt x="3867616" y="2770474"/>
-                  </a:lnTo>
-                  <a:lnTo>
-                    <a:pt x="3795993" y="2751272"/>
-                  </a:lnTo>
-                  <a:lnTo>
-                    <a:pt x="3724371" y="2731552"/>
-                  </a:lnTo>
-                  <a:lnTo>
-                    <a:pt x="3652748" y="2711302"/>
-                  </a:lnTo>
-                  <a:lnTo>
-                    <a:pt x="3581126" y="2690506"/>
-                  </a:lnTo>
-                  <a:lnTo>
-                    <a:pt x="3509503" y="2669151"/>
-                  </a:lnTo>
-                  <a:lnTo>
-                    <a:pt x="3437881" y="2663207"/>
-                  </a:lnTo>
-                  <a:lnTo>
-                    <a:pt x="3366258" y="2690550"/>
-                  </a:lnTo>
-                  <a:lnTo>
-                    <a:pt x="3294636" y="2716982"/>
-                  </a:lnTo>
-                  <a:lnTo>
-                    <a:pt x="3223013" y="2742534"/>
-                  </a:lnTo>
-                  <a:lnTo>
-                    <a:pt x="3151391" y="2767234"/>
-                  </a:lnTo>
-                  <a:lnTo>
-                    <a:pt x="3079768" y="2791111"/>
-                  </a:lnTo>
-                  <a:lnTo>
-                    <a:pt x="3008146" y="2814192"/>
-                  </a:lnTo>
-                  <a:lnTo>
-                    <a:pt x="2936523" y="2836504"/>
-                  </a:lnTo>
-                  <a:lnTo>
-                    <a:pt x="2864901" y="2858073"/>
-                  </a:lnTo>
-                  <a:lnTo>
-                    <a:pt x="2793278" y="2878923"/>
-                  </a:lnTo>
-                  <a:lnTo>
-                    <a:pt x="2721655" y="2899078"/>
-                  </a:lnTo>
-                  <a:lnTo>
-                    <a:pt x="2650033" y="2918561"/>
-                  </a:lnTo>
-                  <a:lnTo>
-                    <a:pt x="2578410" y="2937395"/>
-                  </a:lnTo>
-                  <a:lnTo>
-                    <a:pt x="2506788" y="2955602"/>
-                  </a:lnTo>
-                  <a:lnTo>
-                    <a:pt x="2435165" y="2973202"/>
-                  </a:lnTo>
-                  <a:lnTo>
-                    <a:pt x="2363543" y="2990215"/>
-                  </a:lnTo>
-                  <a:lnTo>
-                    <a:pt x="2291920" y="3006661"/>
-                  </a:lnTo>
-                  <a:lnTo>
-                    <a:pt x="2220298" y="3022560"/>
-                  </a:lnTo>
-                  <a:lnTo>
-                    <a:pt x="2148675" y="3037928"/>
-                  </a:lnTo>
-                  <a:lnTo>
-                    <a:pt x="2077053" y="3052784"/>
-                  </a:lnTo>
-                  <a:lnTo>
-                    <a:pt x="2005430" y="3067146"/>
-                  </a:lnTo>
-                  <a:lnTo>
-                    <a:pt x="1933808" y="3081028"/>
-                  </a:lnTo>
-                  <a:lnTo>
-                    <a:pt x="1862185" y="3094449"/>
-                  </a:lnTo>
-                  <a:lnTo>
-                    <a:pt x="1790563" y="3107421"/>
-                  </a:lnTo>
-                  <a:lnTo>
-                    <a:pt x="1718940" y="3119962"/>
-                  </a:lnTo>
-                  <a:lnTo>
-                    <a:pt x="1647318" y="3132085"/>
-                  </a:lnTo>
-                  <a:lnTo>
-                    <a:pt x="1575695" y="3143803"/>
-                  </a:lnTo>
-                  <a:lnTo>
-                    <a:pt x="1504073" y="3155132"/>
-                  </a:lnTo>
-                  <a:lnTo>
-                    <a:pt x="1432450" y="3166082"/>
-                  </a:lnTo>
-                  <a:lnTo>
-                    <a:pt x="1360827" y="3176668"/>
-                  </a:lnTo>
-                  <a:lnTo>
-                    <a:pt x="1289205" y="3186901"/>
-                  </a:lnTo>
-                  <a:lnTo>
-                    <a:pt x="1217582" y="3196793"/>
-                  </a:lnTo>
-                  <a:lnTo>
-                    <a:pt x="1145960" y="3206356"/>
-                  </a:lnTo>
-                  <a:lnTo>
-                    <a:pt x="1074337" y="3215599"/>
-                  </a:lnTo>
-                  <a:lnTo>
-                    <a:pt x="1002715" y="3224535"/>
-                  </a:lnTo>
-                  <a:lnTo>
-                    <a:pt x="931092" y="3233173"/>
-                  </a:lnTo>
-                  <a:lnTo>
-                    <a:pt x="859470" y="3241523"/>
-                  </a:lnTo>
-                  <a:lnTo>
-                    <a:pt x="787847" y="3249595"/>
-                  </a:lnTo>
-                  <a:lnTo>
-                    <a:pt x="716225" y="3257398"/>
-                  </a:lnTo>
-                  <a:lnTo>
-                    <a:pt x="644602" y="3264940"/>
-                  </a:lnTo>
-                  <a:lnTo>
-                    <a:pt x="572980" y="3272232"/>
-                  </a:lnTo>
-                  <a:lnTo>
-                    <a:pt x="501357" y="3279280"/>
-                  </a:lnTo>
-                  <a:lnTo>
-                    <a:pt x="429735" y="3286094"/>
-                  </a:lnTo>
-                  <a:lnTo>
-                    <a:pt x="358112" y="3292680"/>
-                  </a:lnTo>
-                  <a:lnTo>
-                    <a:pt x="286490" y="3299047"/>
-                  </a:lnTo>
-                  <a:lnTo>
-                    <a:pt x="214867" y="3305202"/>
-                  </a:lnTo>
-                  <a:lnTo>
-                    <a:pt x="143245" y="3311152"/>
-                  </a:lnTo>
-                  <a:lnTo>
-                    <a:pt x="71622" y="3316904"/>
-                  </a:lnTo>
-                  <a:lnTo>
-                    <a:pt x="0" y="3322463"/>
+                    <a:pt x="7090630" y="3266324"/>
+                  </a:lnTo>
+                  <a:lnTo>
+                    <a:pt x="7019007" y="3260478"/>
+                  </a:lnTo>
+                  <a:lnTo>
+                    <a:pt x="6947385" y="3254475"/>
+                  </a:lnTo>
+                  <a:lnTo>
+                    <a:pt x="6875762" y="3248310"/>
+                  </a:lnTo>
+                  <a:lnTo>
+                    <a:pt x="6804139" y="3241979"/>
+                  </a:lnTo>
+                  <a:lnTo>
+                    <a:pt x="6732517" y="3235478"/>
+                  </a:lnTo>
+                  <a:lnTo>
+                    <a:pt x="6660894" y="3228802"/>
+                  </a:lnTo>
+                  <a:lnTo>
+                    <a:pt x="6589272" y="3221947"/>
+                  </a:lnTo>
+                  <a:lnTo>
+                    <a:pt x="6517649" y="3214908"/>
+                  </a:lnTo>
+                  <a:lnTo>
+                    <a:pt x="6446027" y="3207679"/>
+                  </a:lnTo>
+                  <a:lnTo>
+                    <a:pt x="6374404" y="3200255"/>
+                  </a:lnTo>
+                  <a:lnTo>
+                    <a:pt x="6302782" y="3192633"/>
+                  </a:lnTo>
+                  <a:lnTo>
+                    <a:pt x="6231159" y="3184805"/>
+                  </a:lnTo>
+                  <a:lnTo>
+                    <a:pt x="6159537" y="3176766"/>
+                  </a:lnTo>
+                  <a:lnTo>
+                    <a:pt x="6087914" y="3168512"/>
+                  </a:lnTo>
+                  <a:lnTo>
+                    <a:pt x="6016292" y="3160036"/>
+                  </a:lnTo>
+                  <a:lnTo>
+                    <a:pt x="5944669" y="3151331"/>
+                  </a:lnTo>
+                  <a:lnTo>
+                    <a:pt x="5873047" y="3142393"/>
+                  </a:lnTo>
+                  <a:lnTo>
+                    <a:pt x="5801424" y="3133214"/>
+                  </a:lnTo>
+                  <a:lnTo>
+                    <a:pt x="5729802" y="3123789"/>
+                  </a:lnTo>
+                  <a:lnTo>
+                    <a:pt x="5658179" y="3114110"/>
+                  </a:lnTo>
+                  <a:lnTo>
+                    <a:pt x="5586557" y="3104170"/>
+                  </a:lnTo>
+                  <a:lnTo>
+                    <a:pt x="5514934" y="3093964"/>
+                  </a:lnTo>
+                  <a:lnTo>
+                    <a:pt x="5443311" y="3083483"/>
+                  </a:lnTo>
+                  <a:lnTo>
+                    <a:pt x="5371689" y="3072720"/>
+                  </a:lnTo>
+                  <a:lnTo>
+                    <a:pt x="5300066" y="3061668"/>
+                  </a:lnTo>
+                  <a:lnTo>
+                    <a:pt x="5228444" y="3050319"/>
+                  </a:lnTo>
+                  <a:lnTo>
+                    <a:pt x="5156821" y="3038664"/>
+                  </a:lnTo>
+                  <a:lnTo>
+                    <a:pt x="5085199" y="3026696"/>
+                  </a:lnTo>
+                  <a:lnTo>
+                    <a:pt x="5013576" y="3014407"/>
+                  </a:lnTo>
+                  <a:lnTo>
+                    <a:pt x="4941954" y="3001786"/>
+                  </a:lnTo>
+                  <a:lnTo>
+                    <a:pt x="4870331" y="2988827"/>
+                  </a:lnTo>
+                  <a:lnTo>
+                    <a:pt x="4798709" y="2975519"/>
+                  </a:lnTo>
+                  <a:lnTo>
+                    <a:pt x="4727086" y="2961853"/>
+                  </a:lnTo>
+                  <a:lnTo>
+                    <a:pt x="4655464" y="2947820"/>
+                  </a:lnTo>
+                  <a:lnTo>
+                    <a:pt x="4583841" y="2933409"/>
+                  </a:lnTo>
+                  <a:lnTo>
+                    <a:pt x="4512219" y="2918611"/>
+                  </a:lnTo>
+                  <a:lnTo>
+                    <a:pt x="4440596" y="2903415"/>
+                  </a:lnTo>
+                  <a:lnTo>
+                    <a:pt x="4368974" y="2887810"/>
+                  </a:lnTo>
+                  <a:lnTo>
+                    <a:pt x="4297351" y="2871786"/>
+                  </a:lnTo>
+                  <a:lnTo>
+                    <a:pt x="4225729" y="2855331"/>
+                  </a:lnTo>
+                  <a:lnTo>
+                    <a:pt x="4154106" y="2838433"/>
+                  </a:lnTo>
+                  <a:lnTo>
+                    <a:pt x="4082483" y="2821082"/>
+                  </a:lnTo>
+                  <a:lnTo>
+                    <a:pt x="4010861" y="2803263"/>
+                  </a:lnTo>
+                  <a:lnTo>
+                    <a:pt x="3939238" y="2784965"/>
+                  </a:lnTo>
+                  <a:lnTo>
+                    <a:pt x="3867616" y="2766176"/>
+                  </a:lnTo>
+                  <a:lnTo>
+                    <a:pt x="3795993" y="2746881"/>
+                  </a:lnTo>
+                  <a:lnTo>
+                    <a:pt x="3724371" y="2727067"/>
+                  </a:lnTo>
+                  <a:lnTo>
+                    <a:pt x="3652748" y="2706721"/>
+                  </a:lnTo>
+                  <a:lnTo>
+                    <a:pt x="3581126" y="2685827"/>
+                  </a:lnTo>
+                  <a:lnTo>
+                    <a:pt x="3509503" y="2664372"/>
+                  </a:lnTo>
+                  <a:lnTo>
+                    <a:pt x="3437881" y="2669358"/>
+                  </a:lnTo>
+                  <a:lnTo>
+                    <a:pt x="3366258" y="2696615"/>
+                  </a:lnTo>
+                  <a:lnTo>
+                    <a:pt x="3294636" y="2722959"/>
+                  </a:lnTo>
+                  <a:lnTo>
+                    <a:pt x="3223013" y="2748422"/>
+                  </a:lnTo>
+                  <a:lnTo>
+                    <a:pt x="3151391" y="2773032"/>
+                  </a:lnTo>
+                  <a:lnTo>
+                    <a:pt x="3079768" y="2796819"/>
+                  </a:lnTo>
+                  <a:lnTo>
+                    <a:pt x="3008146" y="2819810"/>
+                  </a:lnTo>
+                  <a:lnTo>
+                    <a:pt x="2936523" y="2842031"/>
+                  </a:lnTo>
+                  <a:lnTo>
+                    <a:pt x="2864901" y="2863509"/>
+                  </a:lnTo>
+                  <a:lnTo>
+                    <a:pt x="2793278" y="2884267"/>
+                  </a:lnTo>
+                  <a:lnTo>
+                    <a:pt x="2721655" y="2904331"/>
+                  </a:lnTo>
+                  <a:lnTo>
+                    <a:pt x="2650033" y="2923724"/>
+                  </a:lnTo>
+                  <a:lnTo>
+                    <a:pt x="2578410" y="2942467"/>
+                  </a:lnTo>
+                  <a:lnTo>
+                    <a:pt x="2506788" y="2960583"/>
+                  </a:lnTo>
+                  <a:lnTo>
+                    <a:pt x="2435165" y="2978093"/>
+                  </a:lnTo>
+                  <a:lnTo>
+                    <a:pt x="2363543" y="2995017"/>
+                  </a:lnTo>
+                  <a:lnTo>
+                    <a:pt x="2291920" y="3011374"/>
+                  </a:lnTo>
+                  <a:lnTo>
+                    <a:pt x="2220298" y="3027184"/>
+                  </a:lnTo>
+                  <a:lnTo>
+                    <a:pt x="2148675" y="3042464"/>
+                  </a:lnTo>
+                  <a:lnTo>
+                    <a:pt x="2077053" y="3057234"/>
+                  </a:lnTo>
+                  <a:lnTo>
+                    <a:pt x="2005430" y="3071508"/>
+                  </a:lnTo>
+                  <a:lnTo>
+                    <a:pt x="1933808" y="3085306"/>
+                  </a:lnTo>
+                  <a:lnTo>
+                    <a:pt x="1862185" y="3098641"/>
+                  </a:lnTo>
+                  <a:lnTo>
+                    <a:pt x="1790563" y="3111530"/>
+                  </a:lnTo>
+                  <a:lnTo>
+                    <a:pt x="1718940" y="3123988"/>
+                  </a:lnTo>
+                  <a:lnTo>
+                    <a:pt x="1647318" y="3136029"/>
+                  </a:lnTo>
+                  <a:lnTo>
+                    <a:pt x="1575695" y="3147666"/>
+                  </a:lnTo>
+                  <a:lnTo>
+                    <a:pt x="1504073" y="3158915"/>
+                  </a:lnTo>
+                  <a:lnTo>
+                    <a:pt x="1432450" y="3169786"/>
+                  </a:lnTo>
+                  <a:lnTo>
+                    <a:pt x="1360827" y="3180294"/>
+                  </a:lnTo>
+                  <a:lnTo>
+                    <a:pt x="1289205" y="3190450"/>
+                  </a:lnTo>
+                  <a:lnTo>
+                    <a:pt x="1217582" y="3200267"/>
+                  </a:lnTo>
+                  <a:lnTo>
+                    <a:pt x="1145960" y="3209755"/>
+                  </a:lnTo>
+                  <a:lnTo>
+                    <a:pt x="1074337" y="3218925"/>
+                  </a:lnTo>
+                  <a:lnTo>
+                    <a:pt x="1002715" y="3227788"/>
+                  </a:lnTo>
+                  <a:lnTo>
+                    <a:pt x="931092" y="3236355"/>
+                  </a:lnTo>
+                  <a:lnTo>
+                    <a:pt x="859470" y="3244635"/>
+                  </a:lnTo>
+                  <a:lnTo>
+                    <a:pt x="787847" y="3252637"/>
+                  </a:lnTo>
+                  <a:lnTo>
+                    <a:pt x="716225" y="3260372"/>
+                  </a:lnTo>
+                  <a:lnTo>
+                    <a:pt x="644602" y="3267848"/>
+                  </a:lnTo>
+                  <a:lnTo>
+                    <a:pt x="572980" y="3275074"/>
+                  </a:lnTo>
+                  <a:lnTo>
+                    <a:pt x="501357" y="3282058"/>
+                  </a:lnTo>
+                  <a:lnTo>
+                    <a:pt x="429735" y="3288809"/>
+                  </a:lnTo>
+                  <a:lnTo>
+                    <a:pt x="358112" y="3295333"/>
+                  </a:lnTo>
+                  <a:lnTo>
+                    <a:pt x="286490" y="3301639"/>
+                  </a:lnTo>
+                  <a:lnTo>
+                    <a:pt x="214867" y="3307734"/>
+                  </a:lnTo>
+                  <a:lnTo>
+                    <a:pt x="143245" y="3313625"/>
+                  </a:lnTo>
+                  <a:lnTo>
+                    <a:pt x="71622" y="3319319"/>
+                  </a:lnTo>
+                  <a:lnTo>
+                    <a:pt x="0" y="3324822"/>
                   </a:lnTo>
                   <a:close/>
                 </a:path>
@@ -4000,287 +4000,287 @@
           <p:spPr>
             <a:xfrm>
               <a:off x="1172049" y="2073503"/>
-              <a:ext cx="6493197" cy="2647220"/>
+              <a:ext cx="6495567" cy="2642339"/>
             </a:xfrm>
             <a:custGeom>
               <a:avLst/>
               <a:pathLst>
-                <a:path w="6493197" h="2647220">
+                <a:path w="6495567" h="2642339">
                   <a:moveTo>
-                    <a:pt x="0" y="489596"/>
+                    <a:pt x="0" y="476713"/>
                   </a:moveTo>
                   <a:lnTo>
-                    <a:pt x="71622" y="568091"/>
-                  </a:lnTo>
-                  <a:lnTo>
-                    <a:pt x="143245" y="644528"/>
-                  </a:lnTo>
-                  <a:lnTo>
-                    <a:pt x="214867" y="718961"/>
-                  </a:lnTo>
-                  <a:lnTo>
-                    <a:pt x="286490" y="791442"/>
-                  </a:lnTo>
-                  <a:lnTo>
-                    <a:pt x="358112" y="862024"/>
-                  </a:lnTo>
-                  <a:lnTo>
-                    <a:pt x="429735" y="930755"/>
-                  </a:lnTo>
-                  <a:lnTo>
-                    <a:pt x="501357" y="997684"/>
-                  </a:lnTo>
-                  <a:lnTo>
-                    <a:pt x="572980" y="1062859"/>
-                  </a:lnTo>
-                  <a:lnTo>
-                    <a:pt x="644602" y="1126325"/>
-                  </a:lnTo>
-                  <a:lnTo>
-                    <a:pt x="716225" y="1188127"/>
-                  </a:lnTo>
-                  <a:lnTo>
-                    <a:pt x="787847" y="1248309"/>
-                  </a:lnTo>
-                  <a:lnTo>
-                    <a:pt x="859470" y="1306913"/>
-                  </a:lnTo>
-                  <a:lnTo>
-                    <a:pt x="931092" y="1363981"/>
-                  </a:lnTo>
-                  <a:lnTo>
-                    <a:pt x="1002715" y="1419553"/>
-                  </a:lnTo>
-                  <a:lnTo>
-                    <a:pt x="1074337" y="1473668"/>
-                  </a:lnTo>
-                  <a:lnTo>
-                    <a:pt x="1145960" y="1526364"/>
-                  </a:lnTo>
-                  <a:lnTo>
-                    <a:pt x="1217582" y="1577679"/>
-                  </a:lnTo>
-                  <a:lnTo>
-                    <a:pt x="1289205" y="1627649"/>
-                  </a:lnTo>
-                  <a:lnTo>
-                    <a:pt x="1360827" y="1676308"/>
-                  </a:lnTo>
-                  <a:lnTo>
-                    <a:pt x="1432450" y="1723692"/>
-                  </a:lnTo>
-                  <a:lnTo>
-                    <a:pt x="1504073" y="1769834"/>
-                  </a:lnTo>
-                  <a:lnTo>
-                    <a:pt x="1575695" y="1814766"/>
-                  </a:lnTo>
-                  <a:lnTo>
-                    <a:pt x="1647318" y="1858520"/>
-                  </a:lnTo>
-                  <a:lnTo>
-                    <a:pt x="1718940" y="1901127"/>
-                  </a:lnTo>
-                  <a:lnTo>
-                    <a:pt x="1790563" y="1942617"/>
-                  </a:lnTo>
-                  <a:lnTo>
-                    <a:pt x="1862185" y="1983019"/>
-                  </a:lnTo>
-                  <a:lnTo>
-                    <a:pt x="1933808" y="2022362"/>
-                  </a:lnTo>
-                  <a:lnTo>
-                    <a:pt x="2005430" y="2060674"/>
-                  </a:lnTo>
-                  <a:lnTo>
-                    <a:pt x="2077053" y="2097981"/>
-                  </a:lnTo>
-                  <a:lnTo>
-                    <a:pt x="2148675" y="2134310"/>
-                  </a:lnTo>
-                  <a:lnTo>
-                    <a:pt x="2220298" y="2169687"/>
-                  </a:lnTo>
-                  <a:lnTo>
-                    <a:pt x="2291920" y="2204137"/>
-                  </a:lnTo>
-                  <a:lnTo>
-                    <a:pt x="2363543" y="2237683"/>
-                  </a:lnTo>
-                  <a:lnTo>
-                    <a:pt x="2435165" y="2270350"/>
-                  </a:lnTo>
-                  <a:lnTo>
-                    <a:pt x="2506788" y="2302160"/>
-                  </a:lnTo>
-                  <a:lnTo>
-                    <a:pt x="2578410" y="2333137"/>
-                  </a:lnTo>
-                  <a:lnTo>
-                    <a:pt x="2650033" y="2363301"/>
-                  </a:lnTo>
-                  <a:lnTo>
-                    <a:pt x="2721655" y="2392675"/>
-                  </a:lnTo>
-                  <a:lnTo>
-                    <a:pt x="2793278" y="2421278"/>
-                  </a:lnTo>
-                  <a:lnTo>
-                    <a:pt x="2864901" y="2449132"/>
-                  </a:lnTo>
-                  <a:lnTo>
-                    <a:pt x="2936523" y="2476255"/>
-                  </a:lnTo>
-                  <a:lnTo>
-                    <a:pt x="3008146" y="2502668"/>
-                  </a:lnTo>
-                  <a:lnTo>
-                    <a:pt x="3079768" y="2528388"/>
-                  </a:lnTo>
-                  <a:lnTo>
-                    <a:pt x="3151391" y="2553434"/>
-                  </a:lnTo>
-                  <a:lnTo>
-                    <a:pt x="3223013" y="2577823"/>
-                  </a:lnTo>
-                  <a:lnTo>
-                    <a:pt x="3294636" y="2601572"/>
-                  </a:lnTo>
-                  <a:lnTo>
-                    <a:pt x="3366258" y="2624699"/>
-                  </a:lnTo>
-                  <a:lnTo>
-                    <a:pt x="3437881" y="2647220"/>
-                  </a:lnTo>
-                  <a:lnTo>
-                    <a:pt x="3509503" y="2634920"/>
-                  </a:lnTo>
-                  <a:lnTo>
-                    <a:pt x="3581126" y="2605659"/>
-                  </a:lnTo>
-                  <a:lnTo>
-                    <a:pt x="3652748" y="2575389"/>
-                  </a:lnTo>
-                  <a:lnTo>
-                    <a:pt x="3724371" y="2544076"/>
-                  </a:lnTo>
-                  <a:lnTo>
-                    <a:pt x="3795993" y="2511683"/>
-                  </a:lnTo>
-                  <a:lnTo>
-                    <a:pt x="3867616" y="2478173"/>
-                  </a:lnTo>
-                  <a:lnTo>
-                    <a:pt x="3939238" y="2443509"/>
-                  </a:lnTo>
-                  <a:lnTo>
-                    <a:pt x="4010861" y="2407649"/>
-                  </a:lnTo>
-                  <a:lnTo>
-                    <a:pt x="4082483" y="2370553"/>
-                  </a:lnTo>
-                  <a:lnTo>
-                    <a:pt x="4154106" y="2332179"/>
-                  </a:lnTo>
-                  <a:lnTo>
-                    <a:pt x="4225729" y="2292481"/>
-                  </a:lnTo>
-                  <a:lnTo>
-                    <a:pt x="4297351" y="2251415"/>
-                  </a:lnTo>
-                  <a:lnTo>
-                    <a:pt x="4368974" y="2208933"/>
-                  </a:lnTo>
-                  <a:lnTo>
-                    <a:pt x="4440596" y="2164987"/>
-                  </a:lnTo>
-                  <a:lnTo>
-                    <a:pt x="4512219" y="2119526"/>
-                  </a:lnTo>
-                  <a:lnTo>
-                    <a:pt x="4583841" y="2072498"/>
-                  </a:lnTo>
-                  <a:lnTo>
-                    <a:pt x="4655464" y="2023849"/>
-                  </a:lnTo>
-                  <a:lnTo>
-                    <a:pt x="4727086" y="1973522"/>
-                  </a:lnTo>
-                  <a:lnTo>
-                    <a:pt x="4798709" y="1921461"/>
-                  </a:lnTo>
-                  <a:lnTo>
-                    <a:pt x="4870331" y="1867605"/>
-                  </a:lnTo>
-                  <a:lnTo>
-                    <a:pt x="4941954" y="1811892"/>
-                  </a:lnTo>
-                  <a:lnTo>
-                    <a:pt x="5013576" y="1754259"/>
-                  </a:lnTo>
-                  <a:lnTo>
-                    <a:pt x="5085199" y="1694640"/>
-                  </a:lnTo>
-                  <a:lnTo>
-                    <a:pt x="5156821" y="1632964"/>
-                  </a:lnTo>
-                  <a:lnTo>
-                    <a:pt x="5228444" y="1569163"/>
-                  </a:lnTo>
-                  <a:lnTo>
-                    <a:pt x="5300066" y="1503163"/>
-                  </a:lnTo>
-                  <a:lnTo>
-                    <a:pt x="5371689" y="1434887"/>
-                  </a:lnTo>
-                  <a:lnTo>
-                    <a:pt x="5443311" y="1364257"/>
-                  </a:lnTo>
-                  <a:lnTo>
-                    <a:pt x="5514934" y="1291193"/>
-                  </a:lnTo>
-                  <a:lnTo>
-                    <a:pt x="5586557" y="1215610"/>
-                  </a:lnTo>
-                  <a:lnTo>
-                    <a:pt x="5658179" y="1137421"/>
-                  </a:lnTo>
-                  <a:lnTo>
-                    <a:pt x="5729802" y="1056538"/>
-                  </a:lnTo>
-                  <a:lnTo>
-                    <a:pt x="5801424" y="972865"/>
-                  </a:lnTo>
-                  <a:lnTo>
-                    <a:pt x="5873047" y="886309"/>
-                  </a:lnTo>
-                  <a:lnTo>
-                    <a:pt x="5944669" y="796769"/>
-                  </a:lnTo>
-                  <a:lnTo>
-                    <a:pt x="6016292" y="704141"/>
-                  </a:lnTo>
-                  <a:lnTo>
-                    <a:pt x="6087914" y="608321"/>
-                  </a:lnTo>
-                  <a:lnTo>
-                    <a:pt x="6159537" y="509198"/>
-                  </a:lnTo>
-                  <a:lnTo>
-                    <a:pt x="6231159" y="406658"/>
-                  </a:lnTo>
-                  <a:lnTo>
-                    <a:pt x="6302782" y="300582"/>
-                  </a:lnTo>
-                  <a:lnTo>
-                    <a:pt x="6374404" y="190851"/>
-                  </a:lnTo>
-                  <a:lnTo>
-                    <a:pt x="6446027" y="77336"/>
-                  </a:lnTo>
-                  <a:lnTo>
-                    <a:pt x="6493197" y="0"/>
+                    <a:pt x="71622" y="555452"/>
+                  </a:lnTo>
+                  <a:lnTo>
+                    <a:pt x="143245" y="632130"/>
+                  </a:lnTo>
+                  <a:lnTo>
+                    <a:pt x="214867" y="706800"/>
+                  </a:lnTo>
+                  <a:lnTo>
+                    <a:pt x="286490" y="779514"/>
+                  </a:lnTo>
+                  <a:lnTo>
+                    <a:pt x="358112" y="850325"/>
+                  </a:lnTo>
+                  <a:lnTo>
+                    <a:pt x="429735" y="919281"/>
+                  </a:lnTo>
+                  <a:lnTo>
+                    <a:pt x="501357" y="986432"/>
+                  </a:lnTo>
+                  <a:lnTo>
+                    <a:pt x="572980" y="1051825"/>
+                  </a:lnTo>
+                  <a:lnTo>
+                    <a:pt x="644602" y="1115505"/>
+                  </a:lnTo>
+                  <a:lnTo>
+                    <a:pt x="716225" y="1177517"/>
+                  </a:lnTo>
+                  <a:lnTo>
+                    <a:pt x="787847" y="1237906"/>
+                  </a:lnTo>
+                  <a:lnTo>
+                    <a:pt x="859470" y="1296714"/>
+                  </a:lnTo>
+                  <a:lnTo>
+                    <a:pt x="931092" y="1353981"/>
+                  </a:lnTo>
+                  <a:lnTo>
+                    <a:pt x="1002715" y="1409750"/>
+                  </a:lnTo>
+                  <a:lnTo>
+                    <a:pt x="1074337" y="1464057"/>
+                  </a:lnTo>
+                  <a:lnTo>
+                    <a:pt x="1145960" y="1516943"/>
+                  </a:lnTo>
+                  <a:lnTo>
+                    <a:pt x="1217582" y="1568444"/>
+                  </a:lnTo>
+                  <a:lnTo>
+                    <a:pt x="1289205" y="1618596"/>
+                  </a:lnTo>
+                  <a:lnTo>
+                    <a:pt x="1360827" y="1667436"/>
+                  </a:lnTo>
+                  <a:lnTo>
+                    <a:pt x="1432450" y="1714996"/>
+                  </a:lnTo>
+                  <a:lnTo>
+                    <a:pt x="1504073" y="1761311"/>
+                  </a:lnTo>
+                  <a:lnTo>
+                    <a:pt x="1575695" y="1806413"/>
+                  </a:lnTo>
+                  <a:lnTo>
+                    <a:pt x="1647318" y="1850334"/>
+                  </a:lnTo>
+                  <a:lnTo>
+                    <a:pt x="1718940" y="1893105"/>
+                  </a:lnTo>
+                  <a:lnTo>
+                    <a:pt x="1790563" y="1934756"/>
+                  </a:lnTo>
+                  <a:lnTo>
+                    <a:pt x="1862185" y="1975317"/>
+                  </a:lnTo>
+                  <a:lnTo>
+                    <a:pt x="1933808" y="2014815"/>
+                  </a:lnTo>
+                  <a:lnTo>
+                    <a:pt x="2005430" y="2053279"/>
+                  </a:lnTo>
+                  <a:lnTo>
+                    <a:pt x="2077053" y="2090736"/>
+                  </a:lnTo>
+                  <a:lnTo>
+                    <a:pt x="2148675" y="2127212"/>
+                  </a:lnTo>
+                  <a:lnTo>
+                    <a:pt x="2220298" y="2162733"/>
+                  </a:lnTo>
+                  <a:lnTo>
+                    <a:pt x="2291920" y="2197324"/>
+                  </a:lnTo>
+                  <a:lnTo>
+                    <a:pt x="2363543" y="2231009"/>
+                  </a:lnTo>
+                  <a:lnTo>
+                    <a:pt x="2435165" y="2263812"/>
+                  </a:lnTo>
+                  <a:lnTo>
+                    <a:pt x="2506788" y="2295756"/>
+                  </a:lnTo>
+                  <a:lnTo>
+                    <a:pt x="2578410" y="2326864"/>
+                  </a:lnTo>
+                  <a:lnTo>
+                    <a:pt x="2650033" y="2357157"/>
+                  </a:lnTo>
+                  <a:lnTo>
+                    <a:pt x="2721655" y="2386657"/>
+                  </a:lnTo>
+                  <a:lnTo>
+                    <a:pt x="2793278" y="2415384"/>
+                  </a:lnTo>
+                  <a:lnTo>
+                    <a:pt x="2864901" y="2443359"/>
+                  </a:lnTo>
+                  <a:lnTo>
+                    <a:pt x="2936523" y="2470602"/>
+                  </a:lnTo>
+                  <a:lnTo>
+                    <a:pt x="3008146" y="2497131"/>
+                  </a:lnTo>
+                  <a:lnTo>
+                    <a:pt x="3079768" y="2522966"/>
+                  </a:lnTo>
+                  <a:lnTo>
+                    <a:pt x="3151391" y="2548124"/>
+                  </a:lnTo>
+                  <a:lnTo>
+                    <a:pt x="3223013" y="2572624"/>
+                  </a:lnTo>
+                  <a:lnTo>
+                    <a:pt x="3294636" y="2596481"/>
+                  </a:lnTo>
+                  <a:lnTo>
+                    <a:pt x="3366258" y="2619714"/>
+                  </a:lnTo>
+                  <a:lnTo>
+                    <a:pt x="3437881" y="2642339"/>
+                  </a:lnTo>
+                  <a:lnTo>
+                    <a:pt x="3509503" y="2641157"/>
+                  </a:lnTo>
+                  <a:lnTo>
+                    <a:pt x="3581126" y="2611980"/>
+                  </a:lnTo>
+                  <a:lnTo>
+                    <a:pt x="3652748" y="2581793"/>
+                  </a:lnTo>
+                  <a:lnTo>
+                    <a:pt x="3724371" y="2550560"/>
+                  </a:lnTo>
+                  <a:lnTo>
+                    <a:pt x="3795993" y="2518246"/>
+                  </a:lnTo>
+                  <a:lnTo>
+                    <a:pt x="3867616" y="2484813"/>
+                  </a:lnTo>
+                  <a:lnTo>
+                    <a:pt x="3939238" y="2450222"/>
+                  </a:lnTo>
+                  <a:lnTo>
+                    <a:pt x="4010861" y="2414433"/>
+                  </a:lnTo>
+                  <a:lnTo>
+                    <a:pt x="4082483" y="2377405"/>
+                  </a:lnTo>
+                  <a:lnTo>
+                    <a:pt x="4154106" y="2339095"/>
+                  </a:lnTo>
+                  <a:lnTo>
+                    <a:pt x="4225729" y="2299458"/>
+                  </a:lnTo>
+                  <a:lnTo>
+                    <a:pt x="4297351" y="2258448"/>
+                  </a:lnTo>
+                  <a:lnTo>
+                    <a:pt x="4368974" y="2216019"/>
+                  </a:lnTo>
+                  <a:lnTo>
+                    <a:pt x="4440596" y="2172120"/>
+                  </a:lnTo>
+                  <a:lnTo>
+                    <a:pt x="4512219" y="2126701"/>
+                  </a:lnTo>
+                  <a:lnTo>
+                    <a:pt x="4583841" y="2079709"/>
+                  </a:lnTo>
+                  <a:lnTo>
+                    <a:pt x="4655464" y="2031091"/>
+                  </a:lnTo>
+                  <a:lnTo>
+                    <a:pt x="4727086" y="1980788"/>
+                  </a:lnTo>
+                  <a:lnTo>
+                    <a:pt x="4798709" y="1928744"/>
+                  </a:lnTo>
+                  <a:lnTo>
+                    <a:pt x="4870331" y="1874898"/>
+                  </a:lnTo>
+                  <a:lnTo>
+                    <a:pt x="4941954" y="1819186"/>
+                  </a:lnTo>
+                  <a:lnTo>
+                    <a:pt x="5013576" y="1761546"/>
+                  </a:lnTo>
+                  <a:lnTo>
+                    <a:pt x="5085199" y="1701910"/>
+                  </a:lnTo>
+                  <a:lnTo>
+                    <a:pt x="5156821" y="1640209"/>
+                  </a:lnTo>
+                  <a:lnTo>
+                    <a:pt x="5228444" y="1576371"/>
+                  </a:lnTo>
+                  <a:lnTo>
+                    <a:pt x="5300066" y="1510323"/>
+                  </a:lnTo>
+                  <a:lnTo>
+                    <a:pt x="5371689" y="1441987"/>
+                  </a:lnTo>
+                  <a:lnTo>
+                    <a:pt x="5443311" y="1371285"/>
+                  </a:lnTo>
+                  <a:lnTo>
+                    <a:pt x="5514934" y="1298135"/>
+                  </a:lnTo>
+                  <a:lnTo>
+                    <a:pt x="5586557" y="1222452"/>
+                  </a:lnTo>
+                  <a:lnTo>
+                    <a:pt x="5658179" y="1144148"/>
+                  </a:lnTo>
+                  <a:lnTo>
+                    <a:pt x="5729802" y="1063133"/>
+                  </a:lnTo>
+                  <a:lnTo>
+                    <a:pt x="5801424" y="979312"/>
+                  </a:lnTo>
+                  <a:lnTo>
+                    <a:pt x="5873047" y="892589"/>
+                  </a:lnTo>
+                  <a:lnTo>
+                    <a:pt x="5944669" y="802863"/>
+                  </a:lnTo>
+                  <a:lnTo>
+                    <a:pt x="6016292" y="710029"/>
+                  </a:lnTo>
+                  <a:lnTo>
+                    <a:pt x="6087914" y="613981"/>
+                  </a:lnTo>
+                  <a:lnTo>
+                    <a:pt x="6159537" y="514607"/>
+                  </a:lnTo>
+                  <a:lnTo>
+                    <a:pt x="6231159" y="411792"/>
+                  </a:lnTo>
+                  <a:lnTo>
+                    <a:pt x="6302782" y="305417"/>
+                  </a:lnTo>
+                  <a:lnTo>
+                    <a:pt x="6374404" y="195358"/>
+                  </a:lnTo>
+                  <a:lnTo>
+                    <a:pt x="6446027" y="81488"/>
+                  </a:lnTo>
+                  <a:lnTo>
+                    <a:pt x="6495567" y="0"/>
                   </a:lnTo>
                 </a:path>
               </a:pathLst>
@@ -4300,312 +4300,312 @@
           </p:nvSpPr>
           <p:spPr>
             <a:xfrm>
-              <a:off x="1172049" y="4736710"/>
-              <a:ext cx="7090630" cy="659256"/>
+              <a:off x="1172049" y="4737875"/>
+              <a:ext cx="7090630" cy="660450"/>
             </a:xfrm>
             <a:custGeom>
               <a:avLst/>
               <a:pathLst>
-                <a:path w="7090630" h="659256">
+                <a:path w="7090630" h="660450">
                   <a:moveTo>
-                    <a:pt x="7090630" y="604729"/>
+                    <a:pt x="7090630" y="601952"/>
                   </a:moveTo>
                   <a:lnTo>
-                    <a:pt x="7019007" y="598918"/>
-                  </a:lnTo>
-                  <a:lnTo>
-                    <a:pt x="6947385" y="592952"/>
-                  </a:lnTo>
-                  <a:lnTo>
-                    <a:pt x="6875762" y="586825"/>
-                  </a:lnTo>
-                  <a:lnTo>
-                    <a:pt x="6804139" y="580533"/>
-                  </a:lnTo>
-                  <a:lnTo>
-                    <a:pt x="6732517" y="574072"/>
-                  </a:lnTo>
-                  <a:lnTo>
-                    <a:pt x="6660894" y="567436"/>
-                  </a:lnTo>
-                  <a:lnTo>
-                    <a:pt x="6589272" y="560622"/>
-                  </a:lnTo>
-                  <a:lnTo>
-                    <a:pt x="6517649" y="553625"/>
-                  </a:lnTo>
-                  <a:lnTo>
-                    <a:pt x="6446027" y="546439"/>
-                  </a:lnTo>
-                  <a:lnTo>
-                    <a:pt x="6374404" y="539060"/>
-                  </a:lnTo>
-                  <a:lnTo>
-                    <a:pt x="6302782" y="531482"/>
-                  </a:lnTo>
-                  <a:lnTo>
-                    <a:pt x="6231159" y="523700"/>
-                  </a:lnTo>
-                  <a:lnTo>
-                    <a:pt x="6159537" y="515708"/>
-                  </a:lnTo>
-                  <a:lnTo>
-                    <a:pt x="6087914" y="507502"/>
-                  </a:lnTo>
-                  <a:lnTo>
-                    <a:pt x="6016292" y="499074"/>
-                  </a:lnTo>
-                  <a:lnTo>
-                    <a:pt x="5944669" y="490420"/>
-                  </a:lnTo>
-                  <a:lnTo>
-                    <a:pt x="5873047" y="481532"/>
-                  </a:lnTo>
-                  <a:lnTo>
-                    <a:pt x="5801424" y="472406"/>
-                  </a:lnTo>
-                  <a:lnTo>
-                    <a:pt x="5729802" y="463033"/>
-                  </a:lnTo>
-                  <a:lnTo>
-                    <a:pt x="5658179" y="453409"/>
-                  </a:lnTo>
-                  <a:lnTo>
-                    <a:pt x="5586557" y="443525"/>
-                  </a:lnTo>
-                  <a:lnTo>
-                    <a:pt x="5514934" y="433375"/>
-                  </a:lnTo>
-                  <a:lnTo>
-                    <a:pt x="5443311" y="422952"/>
-                  </a:lnTo>
-                  <a:lnTo>
-                    <a:pt x="5371689" y="412248"/>
-                  </a:lnTo>
-                  <a:lnTo>
-                    <a:pt x="5300066" y="401256"/>
-                  </a:lnTo>
-                  <a:lnTo>
-                    <a:pt x="5228444" y="389968"/>
-                  </a:lnTo>
-                  <a:lnTo>
-                    <a:pt x="5156821" y="378376"/>
-                  </a:lnTo>
-                  <a:lnTo>
-                    <a:pt x="5085199" y="366472"/>
-                  </a:lnTo>
-                  <a:lnTo>
-                    <a:pt x="5013576" y="354248"/>
-                  </a:lnTo>
-                  <a:lnTo>
-                    <a:pt x="4941954" y="341695"/>
-                  </a:lnTo>
-                  <a:lnTo>
-                    <a:pt x="4870331" y="328803"/>
-                  </a:lnTo>
-                  <a:lnTo>
-                    <a:pt x="4798709" y="315565"/>
-                  </a:lnTo>
-                  <a:lnTo>
-                    <a:pt x="4727086" y="301970"/>
-                  </a:lnTo>
-                  <a:lnTo>
-                    <a:pt x="4655464" y="288009"/>
-                  </a:lnTo>
-                  <a:lnTo>
-                    <a:pt x="4583841" y="273673"/>
-                  </a:lnTo>
-                  <a:lnTo>
-                    <a:pt x="4512219" y="258950"/>
-                  </a:lnTo>
-                  <a:lnTo>
-                    <a:pt x="4440596" y="243831"/>
-                  </a:lnTo>
-                  <a:lnTo>
-                    <a:pt x="4368974" y="228305"/>
-                  </a:lnTo>
-                  <a:lnTo>
-                    <a:pt x="4297351" y="212361"/>
-                  </a:lnTo>
-                  <a:lnTo>
-                    <a:pt x="4225729" y="195988"/>
-                  </a:lnTo>
-                  <a:lnTo>
-                    <a:pt x="4154106" y="179174"/>
-                  </a:lnTo>
-                  <a:lnTo>
-                    <a:pt x="4082483" y="161907"/>
-                  </a:lnTo>
-                  <a:lnTo>
-                    <a:pt x="4010861" y="144175"/>
-                  </a:lnTo>
-                  <a:lnTo>
-                    <a:pt x="3939238" y="125966"/>
-                  </a:lnTo>
-                  <a:lnTo>
-                    <a:pt x="3867616" y="107267"/>
-                  </a:lnTo>
-                  <a:lnTo>
-                    <a:pt x="3795993" y="88065"/>
-                  </a:lnTo>
-                  <a:lnTo>
-                    <a:pt x="3724371" y="68345"/>
-                  </a:lnTo>
-                  <a:lnTo>
-                    <a:pt x="3652748" y="48095"/>
-                  </a:lnTo>
-                  <a:lnTo>
-                    <a:pt x="3581126" y="27299"/>
-                  </a:lnTo>
-                  <a:lnTo>
-                    <a:pt x="3509503" y="5944"/>
-                  </a:lnTo>
-                  <a:lnTo>
-                    <a:pt x="3437881" y="0"/>
-                  </a:lnTo>
-                  <a:lnTo>
-                    <a:pt x="3366258" y="27343"/>
-                  </a:lnTo>
-                  <a:lnTo>
-                    <a:pt x="3294636" y="53775"/>
-                  </a:lnTo>
-                  <a:lnTo>
-                    <a:pt x="3223013" y="79327"/>
-                  </a:lnTo>
-                  <a:lnTo>
-                    <a:pt x="3151391" y="104027"/>
-                  </a:lnTo>
-                  <a:lnTo>
-                    <a:pt x="3079768" y="127904"/>
-                  </a:lnTo>
-                  <a:lnTo>
-                    <a:pt x="3008146" y="150985"/>
-                  </a:lnTo>
-                  <a:lnTo>
-                    <a:pt x="2936523" y="173297"/>
-                  </a:lnTo>
-                  <a:lnTo>
-                    <a:pt x="2864901" y="194866"/>
-                  </a:lnTo>
-                  <a:lnTo>
-                    <a:pt x="2793278" y="215716"/>
-                  </a:lnTo>
-                  <a:lnTo>
-                    <a:pt x="2721655" y="235871"/>
-                  </a:lnTo>
-                  <a:lnTo>
-                    <a:pt x="2650033" y="255354"/>
-                  </a:lnTo>
-                  <a:lnTo>
-                    <a:pt x="2578410" y="274188"/>
-                  </a:lnTo>
-                  <a:lnTo>
-                    <a:pt x="2506788" y="292395"/>
-                  </a:lnTo>
-                  <a:lnTo>
-                    <a:pt x="2435165" y="309994"/>
-                  </a:lnTo>
-                  <a:lnTo>
-                    <a:pt x="2363543" y="327008"/>
-                  </a:lnTo>
-                  <a:lnTo>
-                    <a:pt x="2291920" y="343454"/>
-                  </a:lnTo>
-                  <a:lnTo>
-                    <a:pt x="2220298" y="359352"/>
-                  </a:lnTo>
-                  <a:lnTo>
-                    <a:pt x="2148675" y="374721"/>
-                  </a:lnTo>
-                  <a:lnTo>
-                    <a:pt x="2077053" y="389577"/>
-                  </a:lnTo>
-                  <a:lnTo>
-                    <a:pt x="2005430" y="403939"/>
-                  </a:lnTo>
-                  <a:lnTo>
-                    <a:pt x="1933808" y="417821"/>
-                  </a:lnTo>
-                  <a:lnTo>
-                    <a:pt x="1862185" y="431241"/>
-                  </a:lnTo>
-                  <a:lnTo>
-                    <a:pt x="1790563" y="444214"/>
-                  </a:lnTo>
-                  <a:lnTo>
-                    <a:pt x="1718940" y="456755"/>
-                  </a:lnTo>
-                  <a:lnTo>
-                    <a:pt x="1647318" y="468878"/>
-                  </a:lnTo>
-                  <a:lnTo>
-                    <a:pt x="1575695" y="480596"/>
-                  </a:lnTo>
-                  <a:lnTo>
-                    <a:pt x="1504073" y="491925"/>
-                  </a:lnTo>
-                  <a:lnTo>
-                    <a:pt x="1432450" y="502875"/>
-                  </a:lnTo>
-                  <a:lnTo>
-                    <a:pt x="1360827" y="513461"/>
-                  </a:lnTo>
-                  <a:lnTo>
-                    <a:pt x="1289205" y="523694"/>
-                  </a:lnTo>
-                  <a:lnTo>
-                    <a:pt x="1217582" y="533586"/>
-                  </a:lnTo>
-                  <a:lnTo>
-                    <a:pt x="1145960" y="543148"/>
-                  </a:lnTo>
-                  <a:lnTo>
-                    <a:pt x="1074337" y="552392"/>
-                  </a:lnTo>
-                  <a:lnTo>
-                    <a:pt x="1002715" y="561328"/>
-                  </a:lnTo>
-                  <a:lnTo>
-                    <a:pt x="931092" y="569966"/>
-                  </a:lnTo>
-                  <a:lnTo>
-                    <a:pt x="859470" y="578316"/>
-                  </a:lnTo>
-                  <a:lnTo>
-                    <a:pt x="787847" y="586388"/>
-                  </a:lnTo>
-                  <a:lnTo>
-                    <a:pt x="716225" y="594190"/>
-                  </a:lnTo>
-                  <a:lnTo>
-                    <a:pt x="644602" y="601733"/>
-                  </a:lnTo>
-                  <a:lnTo>
-                    <a:pt x="572980" y="609025"/>
-                  </a:lnTo>
-                  <a:lnTo>
-                    <a:pt x="501357" y="616073"/>
-                  </a:lnTo>
-                  <a:lnTo>
-                    <a:pt x="429735" y="622887"/>
-                  </a:lnTo>
-                  <a:lnTo>
-                    <a:pt x="358112" y="629473"/>
-                  </a:lnTo>
-                  <a:lnTo>
-                    <a:pt x="286490" y="635840"/>
-                  </a:lnTo>
-                  <a:lnTo>
-                    <a:pt x="214867" y="641995"/>
-                  </a:lnTo>
-                  <a:lnTo>
-                    <a:pt x="143245" y="647945"/>
-                  </a:lnTo>
-                  <a:lnTo>
-                    <a:pt x="71622" y="653697"/>
-                  </a:lnTo>
-                  <a:lnTo>
-                    <a:pt x="0" y="659256"/>
+                    <a:pt x="7019007" y="596106"/>
+                  </a:lnTo>
+                  <a:lnTo>
+                    <a:pt x="6947385" y="590103"/>
+                  </a:lnTo>
+                  <a:lnTo>
+                    <a:pt x="6875762" y="583938"/>
+                  </a:lnTo>
+                  <a:lnTo>
+                    <a:pt x="6804139" y="577607"/>
+                  </a:lnTo>
+                  <a:lnTo>
+                    <a:pt x="6732517" y="571106"/>
+                  </a:lnTo>
+                  <a:lnTo>
+                    <a:pt x="6660894" y="564430"/>
+                  </a:lnTo>
+                  <a:lnTo>
+                    <a:pt x="6589272" y="557575"/>
+                  </a:lnTo>
+                  <a:lnTo>
+                    <a:pt x="6517649" y="550535"/>
+                  </a:lnTo>
+                  <a:lnTo>
+                    <a:pt x="6446027" y="543307"/>
+                  </a:lnTo>
+                  <a:lnTo>
+                    <a:pt x="6374404" y="535883"/>
+                  </a:lnTo>
+                  <a:lnTo>
+                    <a:pt x="6302782" y="528261"/>
+                  </a:lnTo>
+                  <a:lnTo>
+                    <a:pt x="6231159" y="520433"/>
+                  </a:lnTo>
+                  <a:lnTo>
+                    <a:pt x="6159537" y="512394"/>
+                  </a:lnTo>
+                  <a:lnTo>
+                    <a:pt x="6087914" y="504140"/>
+                  </a:lnTo>
+                  <a:lnTo>
+                    <a:pt x="6016292" y="495664"/>
+                  </a:lnTo>
+                  <a:lnTo>
+                    <a:pt x="5944669" y="486959"/>
+                  </a:lnTo>
+                  <a:lnTo>
+                    <a:pt x="5873047" y="478021"/>
+                  </a:lnTo>
+                  <a:lnTo>
+                    <a:pt x="5801424" y="468842"/>
+                  </a:lnTo>
+                  <a:lnTo>
+                    <a:pt x="5729802" y="459417"/>
+                  </a:lnTo>
+                  <a:lnTo>
+                    <a:pt x="5658179" y="449738"/>
+                  </a:lnTo>
+                  <a:lnTo>
+                    <a:pt x="5586557" y="439798"/>
+                  </a:lnTo>
+                  <a:lnTo>
+                    <a:pt x="5514934" y="429592"/>
+                  </a:lnTo>
+                  <a:lnTo>
+                    <a:pt x="5443311" y="419111"/>
+                  </a:lnTo>
+                  <a:lnTo>
+                    <a:pt x="5371689" y="408348"/>
+                  </a:lnTo>
+                  <a:lnTo>
+                    <a:pt x="5300066" y="397296"/>
+                  </a:lnTo>
+                  <a:lnTo>
+                    <a:pt x="5228444" y="385947"/>
+                  </a:lnTo>
+                  <a:lnTo>
+                    <a:pt x="5156821" y="374292"/>
+                  </a:lnTo>
+                  <a:lnTo>
+                    <a:pt x="5085199" y="362324"/>
+                  </a:lnTo>
+                  <a:lnTo>
+                    <a:pt x="5013576" y="350035"/>
+                  </a:lnTo>
+                  <a:lnTo>
+                    <a:pt x="4941954" y="337414"/>
+                  </a:lnTo>
+                  <a:lnTo>
+                    <a:pt x="4870331" y="324455"/>
+                  </a:lnTo>
+                  <a:lnTo>
+                    <a:pt x="4798709" y="311147"/>
+                  </a:lnTo>
+                  <a:lnTo>
+                    <a:pt x="4727086" y="297481"/>
+                  </a:lnTo>
+                  <a:lnTo>
+                    <a:pt x="4655464" y="283448"/>
+                  </a:lnTo>
+                  <a:lnTo>
+                    <a:pt x="4583841" y="269037"/>
+                  </a:lnTo>
+                  <a:lnTo>
+                    <a:pt x="4512219" y="254239"/>
+                  </a:lnTo>
+                  <a:lnTo>
+                    <a:pt x="4440596" y="239043"/>
+                  </a:lnTo>
+                  <a:lnTo>
+                    <a:pt x="4368974" y="223438"/>
+                  </a:lnTo>
+                  <a:lnTo>
+                    <a:pt x="4297351" y="207414"/>
+                  </a:lnTo>
+                  <a:lnTo>
+                    <a:pt x="4225729" y="190959"/>
+                  </a:lnTo>
+                  <a:lnTo>
+                    <a:pt x="4154106" y="174061"/>
+                  </a:lnTo>
+                  <a:lnTo>
+                    <a:pt x="4082483" y="156709"/>
+                  </a:lnTo>
+                  <a:lnTo>
+                    <a:pt x="4010861" y="138891"/>
+                  </a:lnTo>
+                  <a:lnTo>
+                    <a:pt x="3939238" y="120593"/>
+                  </a:lnTo>
+                  <a:lnTo>
+                    <a:pt x="3867616" y="101804"/>
+                  </a:lnTo>
+                  <a:lnTo>
+                    <a:pt x="3795993" y="82509"/>
+                  </a:lnTo>
+                  <a:lnTo>
+                    <a:pt x="3724371" y="62695"/>
+                  </a:lnTo>
+                  <a:lnTo>
+                    <a:pt x="3652748" y="42349"/>
+                  </a:lnTo>
+                  <a:lnTo>
+                    <a:pt x="3581126" y="21455"/>
+                  </a:lnTo>
+                  <a:lnTo>
+                    <a:pt x="3509503" y="0"/>
+                  </a:lnTo>
+                  <a:lnTo>
+                    <a:pt x="3437881" y="4986"/>
+                  </a:lnTo>
+                  <a:lnTo>
+                    <a:pt x="3366258" y="32243"/>
+                  </a:lnTo>
+                  <a:lnTo>
+                    <a:pt x="3294636" y="58587"/>
+                  </a:lnTo>
+                  <a:lnTo>
+                    <a:pt x="3223013" y="84050"/>
+                  </a:lnTo>
+                  <a:lnTo>
+                    <a:pt x="3151391" y="108660"/>
+                  </a:lnTo>
+                  <a:lnTo>
+                    <a:pt x="3079768" y="132447"/>
+                  </a:lnTo>
+                  <a:lnTo>
+                    <a:pt x="3008146" y="155438"/>
+                  </a:lnTo>
+                  <a:lnTo>
+                    <a:pt x="2936523" y="177659"/>
+                  </a:lnTo>
+                  <a:lnTo>
+                    <a:pt x="2864901" y="199137"/>
+                  </a:lnTo>
+                  <a:lnTo>
+                    <a:pt x="2793278" y="219895"/>
+                  </a:lnTo>
+                  <a:lnTo>
+                    <a:pt x="2721655" y="239959"/>
+                  </a:lnTo>
+                  <a:lnTo>
+                    <a:pt x="2650033" y="259352"/>
+                  </a:lnTo>
+                  <a:lnTo>
+                    <a:pt x="2578410" y="278095"/>
+                  </a:lnTo>
+                  <a:lnTo>
+                    <a:pt x="2506788" y="296211"/>
+                  </a:lnTo>
+                  <a:lnTo>
+                    <a:pt x="2435165" y="313721"/>
+                  </a:lnTo>
+                  <a:lnTo>
+                    <a:pt x="2363543" y="330645"/>
+                  </a:lnTo>
+                  <a:lnTo>
+                    <a:pt x="2291920" y="347002"/>
+                  </a:lnTo>
+                  <a:lnTo>
+                    <a:pt x="2220298" y="362812"/>
+                  </a:lnTo>
+                  <a:lnTo>
+                    <a:pt x="2148675" y="378092"/>
+                  </a:lnTo>
+                  <a:lnTo>
+                    <a:pt x="2077053" y="392861"/>
+                  </a:lnTo>
+                  <a:lnTo>
+                    <a:pt x="2005430" y="407136"/>
+                  </a:lnTo>
+                  <a:lnTo>
+                    <a:pt x="1933808" y="420934"/>
+                  </a:lnTo>
+                  <a:lnTo>
+                    <a:pt x="1862185" y="434269"/>
+                  </a:lnTo>
+                  <a:lnTo>
+                    <a:pt x="1790563" y="447158"/>
+                  </a:lnTo>
+                  <a:lnTo>
+                    <a:pt x="1718940" y="459616"/>
+                  </a:lnTo>
+                  <a:lnTo>
+                    <a:pt x="1647318" y="471656"/>
+                  </a:lnTo>
+                  <a:lnTo>
+                    <a:pt x="1575695" y="483294"/>
+                  </a:lnTo>
+                  <a:lnTo>
+                    <a:pt x="1504073" y="494542"/>
+                  </a:lnTo>
+                  <a:lnTo>
+                    <a:pt x="1432450" y="505414"/>
+                  </a:lnTo>
+                  <a:lnTo>
+                    <a:pt x="1360827" y="515922"/>
+                  </a:lnTo>
+                  <a:lnTo>
+                    <a:pt x="1289205" y="526078"/>
+                  </a:lnTo>
+                  <a:lnTo>
+                    <a:pt x="1217582" y="535895"/>
+                  </a:lnTo>
+                  <a:lnTo>
+                    <a:pt x="1145960" y="545382"/>
+                  </a:lnTo>
+                  <a:lnTo>
+                    <a:pt x="1074337" y="554553"/>
+                  </a:lnTo>
+                  <a:lnTo>
+                    <a:pt x="1002715" y="563416"/>
+                  </a:lnTo>
+                  <a:lnTo>
+                    <a:pt x="931092" y="571983"/>
+                  </a:lnTo>
+                  <a:lnTo>
+                    <a:pt x="859470" y="580263"/>
+                  </a:lnTo>
+                  <a:lnTo>
+                    <a:pt x="787847" y="588265"/>
+                  </a:lnTo>
+                  <a:lnTo>
+                    <a:pt x="716225" y="596000"/>
+                  </a:lnTo>
+                  <a:lnTo>
+                    <a:pt x="644602" y="603476"/>
+                  </a:lnTo>
+                  <a:lnTo>
+                    <a:pt x="572980" y="610702"/>
+                  </a:lnTo>
+                  <a:lnTo>
+                    <a:pt x="501357" y="617686"/>
+                  </a:lnTo>
+                  <a:lnTo>
+                    <a:pt x="429735" y="624437"/>
+                  </a:lnTo>
+                  <a:lnTo>
+                    <a:pt x="358112" y="630961"/>
+                  </a:lnTo>
+                  <a:lnTo>
+                    <a:pt x="286490" y="637267"/>
+                  </a:lnTo>
+                  <a:lnTo>
+                    <a:pt x="214867" y="643362"/>
+                  </a:lnTo>
+                  <a:lnTo>
+                    <a:pt x="143245" y="649253"/>
+                  </a:lnTo>
+                  <a:lnTo>
+                    <a:pt x="71622" y="654947"/>
+                  </a:lnTo>
+                  <a:lnTo>
+                    <a:pt x="0" y="660450"/>
                   </a:lnTo>
                 </a:path>
               </a:pathLst>
@@ -4625,309 +4625,309 @@
           </p:nvSpPr>
           <p:spPr>
             <a:xfrm>
-              <a:off x="1172049" y="4558583"/>
-              <a:ext cx="7090630" cy="303752"/>
+              <a:off x="1172049" y="4554796"/>
+              <a:ext cx="7090630" cy="311156"/>
             </a:xfrm>
             <a:custGeom>
               <a:avLst/>
               <a:pathLst>
-                <a:path w="7090630" h="303752">
+                <a:path w="7090630" h="311156">
                   <a:moveTo>
-                    <a:pt x="0" y="303752"/>
+                    <a:pt x="0" y="311156"/>
                   </a:moveTo>
                   <a:lnTo>
-                    <a:pt x="71622" y="301202"/>
-                  </a:lnTo>
-                  <a:lnTo>
-                    <a:pt x="143245" y="298643"/>
-                  </a:lnTo>
-                  <a:lnTo>
-                    <a:pt x="214867" y="296074"/>
-                  </a:lnTo>
-                  <a:lnTo>
-                    <a:pt x="286490" y="293495"/>
-                  </a:lnTo>
-                  <a:lnTo>
-                    <a:pt x="358112" y="290908"/>
-                  </a:lnTo>
-                  <a:lnTo>
-                    <a:pt x="429735" y="288310"/>
-                  </a:lnTo>
-                  <a:lnTo>
-                    <a:pt x="501357" y="285704"/>
-                  </a:lnTo>
-                  <a:lnTo>
-                    <a:pt x="572980" y="283087"/>
-                  </a:lnTo>
-                  <a:lnTo>
-                    <a:pt x="644602" y="280461"/>
-                  </a:lnTo>
-                  <a:lnTo>
-                    <a:pt x="716225" y="277826"/>
-                  </a:lnTo>
-                  <a:lnTo>
-                    <a:pt x="787847" y="275181"/>
-                  </a:lnTo>
-                  <a:lnTo>
-                    <a:pt x="859470" y="272526"/>
-                  </a:lnTo>
-                  <a:lnTo>
-                    <a:pt x="931092" y="269861"/>
-                  </a:lnTo>
-                  <a:lnTo>
-                    <a:pt x="1002715" y="267186"/>
-                  </a:lnTo>
-                  <a:lnTo>
-                    <a:pt x="1074337" y="264502"/>
-                  </a:lnTo>
-                  <a:lnTo>
-                    <a:pt x="1145960" y="261808"/>
-                  </a:lnTo>
-                  <a:lnTo>
-                    <a:pt x="1217582" y="259104"/>
-                  </a:lnTo>
-                  <a:lnTo>
-                    <a:pt x="1289205" y="256390"/>
-                  </a:lnTo>
-                  <a:lnTo>
-                    <a:pt x="1360827" y="253666"/>
-                  </a:lnTo>
-                  <a:lnTo>
-                    <a:pt x="1432450" y="250932"/>
-                  </a:lnTo>
-                  <a:lnTo>
-                    <a:pt x="1504073" y="248188"/>
-                  </a:lnTo>
-                  <a:lnTo>
-                    <a:pt x="1575695" y="245434"/>
-                  </a:lnTo>
-                  <a:lnTo>
-                    <a:pt x="1647318" y="242670"/>
-                  </a:lnTo>
-                  <a:lnTo>
-                    <a:pt x="1718940" y="239896"/>
-                  </a:lnTo>
-                  <a:lnTo>
-                    <a:pt x="1790563" y="237111"/>
-                  </a:lnTo>
-                  <a:lnTo>
-                    <a:pt x="1862185" y="234317"/>
-                  </a:lnTo>
-                  <a:lnTo>
-                    <a:pt x="1933808" y="231512"/>
-                  </a:lnTo>
-                  <a:lnTo>
-                    <a:pt x="2005430" y="228697"/>
-                  </a:lnTo>
-                  <a:lnTo>
-                    <a:pt x="2077053" y="225871"/>
-                  </a:lnTo>
-                  <a:lnTo>
-                    <a:pt x="2148675" y="223035"/>
-                  </a:lnTo>
-                  <a:lnTo>
-                    <a:pt x="2220298" y="220189"/>
-                  </a:lnTo>
-                  <a:lnTo>
-                    <a:pt x="2291920" y="217332"/>
-                  </a:lnTo>
-                  <a:lnTo>
-                    <a:pt x="2363543" y="214465"/>
-                  </a:lnTo>
-                  <a:lnTo>
-                    <a:pt x="2435165" y="211587"/>
-                  </a:lnTo>
-                  <a:lnTo>
-                    <a:pt x="2506788" y="208699"/>
-                  </a:lnTo>
-                  <a:lnTo>
-                    <a:pt x="2578410" y="205800"/>
-                  </a:lnTo>
-                  <a:lnTo>
-                    <a:pt x="2650033" y="202890"/>
-                  </a:lnTo>
-                  <a:lnTo>
-                    <a:pt x="2721655" y="199970"/>
-                  </a:lnTo>
-                  <a:lnTo>
-                    <a:pt x="2793278" y="197039"/>
-                  </a:lnTo>
-                  <a:lnTo>
-                    <a:pt x="2864901" y="194097"/>
-                  </a:lnTo>
-                  <a:lnTo>
-                    <a:pt x="2936523" y="191145"/>
-                  </a:lnTo>
-                  <a:lnTo>
-                    <a:pt x="3008146" y="188182"/>
-                  </a:lnTo>
-                  <a:lnTo>
-                    <a:pt x="3079768" y="185207"/>
-                  </a:lnTo>
-                  <a:lnTo>
-                    <a:pt x="3151391" y="182222"/>
-                  </a:lnTo>
-                  <a:lnTo>
-                    <a:pt x="3223013" y="179226"/>
-                  </a:lnTo>
-                  <a:lnTo>
-                    <a:pt x="3294636" y="176219"/>
-                  </a:lnTo>
-                  <a:lnTo>
-                    <a:pt x="3366258" y="173201"/>
-                  </a:lnTo>
-                  <a:lnTo>
-                    <a:pt x="3437881" y="170172"/>
-                  </a:lnTo>
-                  <a:lnTo>
-                    <a:pt x="3509503" y="167131"/>
-                  </a:lnTo>
-                  <a:lnTo>
-                    <a:pt x="3581126" y="164080"/>
-                  </a:lnTo>
-                  <a:lnTo>
-                    <a:pt x="3652748" y="161017"/>
-                  </a:lnTo>
-                  <a:lnTo>
-                    <a:pt x="3724371" y="157943"/>
-                  </a:lnTo>
-                  <a:lnTo>
-                    <a:pt x="3795993" y="154858"/>
-                  </a:lnTo>
-                  <a:lnTo>
-                    <a:pt x="3867616" y="151762"/>
-                  </a:lnTo>
-                  <a:lnTo>
-                    <a:pt x="3939238" y="148654"/>
-                  </a:lnTo>
-                  <a:lnTo>
-                    <a:pt x="4010861" y="145535"/>
-                  </a:lnTo>
-                  <a:lnTo>
-                    <a:pt x="4082483" y="142404"/>
-                  </a:lnTo>
-                  <a:lnTo>
-                    <a:pt x="4154106" y="139262"/>
-                  </a:lnTo>
-                  <a:lnTo>
-                    <a:pt x="4225729" y="136108"/>
-                  </a:lnTo>
-                  <a:lnTo>
-                    <a:pt x="4297351" y="132943"/>
-                  </a:lnTo>
-                  <a:lnTo>
-                    <a:pt x="4368974" y="129766"/>
-                  </a:lnTo>
-                  <a:lnTo>
-                    <a:pt x="4440596" y="126577"/>
-                  </a:lnTo>
-                  <a:lnTo>
-                    <a:pt x="4512219" y="123377"/>
-                  </a:lnTo>
-                  <a:lnTo>
-                    <a:pt x="4583841" y="120165"/>
-                  </a:lnTo>
-                  <a:lnTo>
-                    <a:pt x="4655464" y="116941"/>
-                  </a:lnTo>
-                  <a:lnTo>
-                    <a:pt x="4727086" y="113705"/>
-                  </a:lnTo>
-                  <a:lnTo>
-                    <a:pt x="4798709" y="110458"/>
-                  </a:lnTo>
-                  <a:lnTo>
-                    <a:pt x="4870331" y="107198"/>
-                  </a:lnTo>
-                  <a:lnTo>
-                    <a:pt x="4941954" y="103927"/>
-                  </a:lnTo>
-                  <a:lnTo>
-                    <a:pt x="5013576" y="100644"/>
-                  </a:lnTo>
-                  <a:lnTo>
-                    <a:pt x="5085199" y="97348"/>
-                  </a:lnTo>
-                  <a:lnTo>
-                    <a:pt x="5156821" y="94041"/>
-                  </a:lnTo>
-                  <a:lnTo>
-                    <a:pt x="5228444" y="90721"/>
-                  </a:lnTo>
-                  <a:lnTo>
-                    <a:pt x="5300066" y="87389"/>
-                  </a:lnTo>
-                  <a:lnTo>
-                    <a:pt x="5371689" y="84045"/>
-                  </a:lnTo>
-                  <a:lnTo>
-                    <a:pt x="5443311" y="80689"/>
-                  </a:lnTo>
-                  <a:lnTo>
-                    <a:pt x="5514934" y="77320"/>
-                  </a:lnTo>
-                  <a:lnTo>
-                    <a:pt x="5586557" y="73939"/>
-                  </a:lnTo>
-                  <a:lnTo>
-                    <a:pt x="5658179" y="70545"/>
-                  </a:lnTo>
-                  <a:lnTo>
-                    <a:pt x="5729802" y="67139"/>
-                  </a:lnTo>
-                  <a:lnTo>
-                    <a:pt x="5801424" y="63721"/>
-                  </a:lnTo>
-                  <a:lnTo>
-                    <a:pt x="5873047" y="60290"/>
-                  </a:lnTo>
-                  <a:lnTo>
-                    <a:pt x="5944669" y="56847"/>
-                  </a:lnTo>
-                  <a:lnTo>
-                    <a:pt x="6016292" y="53390"/>
-                  </a:lnTo>
-                  <a:lnTo>
-                    <a:pt x="6087914" y="49922"/>
-                  </a:lnTo>
-                  <a:lnTo>
-                    <a:pt x="6159537" y="46440"/>
-                  </a:lnTo>
-                  <a:lnTo>
-                    <a:pt x="6231159" y="42946"/>
-                  </a:lnTo>
-                  <a:lnTo>
-                    <a:pt x="6302782" y="39438"/>
-                  </a:lnTo>
-                  <a:lnTo>
-                    <a:pt x="6374404" y="35918"/>
-                  </a:lnTo>
-                  <a:lnTo>
-                    <a:pt x="6446027" y="32385"/>
-                  </a:lnTo>
-                  <a:lnTo>
-                    <a:pt x="6517649" y="28839"/>
-                  </a:lnTo>
-                  <a:lnTo>
-                    <a:pt x="6589272" y="25281"/>
-                  </a:lnTo>
-                  <a:lnTo>
-                    <a:pt x="6660894" y="21709"/>
-                  </a:lnTo>
-                  <a:lnTo>
-                    <a:pt x="6732517" y="18123"/>
-                  </a:lnTo>
-                  <a:lnTo>
-                    <a:pt x="6804139" y="14525"/>
-                  </a:lnTo>
-                  <a:lnTo>
-                    <a:pt x="6875762" y="10914"/>
-                  </a:lnTo>
-                  <a:lnTo>
-                    <a:pt x="6947385" y="7289"/>
-                  </a:lnTo>
-                  <a:lnTo>
-                    <a:pt x="7019007" y="3651"/>
+                    <a:pt x="71622" y="308556"/>
+                  </a:lnTo>
+                  <a:lnTo>
+                    <a:pt x="143245" y="305946"/>
+                  </a:lnTo>
+                  <a:lnTo>
+                    <a:pt x="214867" y="303327"/>
+                  </a:lnTo>
+                  <a:lnTo>
+                    <a:pt x="286490" y="300697"/>
+                  </a:lnTo>
+                  <a:lnTo>
+                    <a:pt x="358112" y="298058"/>
+                  </a:lnTo>
+                  <a:lnTo>
+                    <a:pt x="429735" y="295409"/>
+                  </a:lnTo>
+                  <a:lnTo>
+                    <a:pt x="501357" y="292750"/>
+                  </a:lnTo>
+                  <a:lnTo>
+                    <a:pt x="572980" y="290081"/>
+                  </a:lnTo>
+                  <a:lnTo>
+                    <a:pt x="644602" y="287401"/>
+                  </a:lnTo>
+                  <a:lnTo>
+                    <a:pt x="716225" y="284712"/>
+                  </a:lnTo>
+                  <a:lnTo>
+                    <a:pt x="787847" y="282013"/>
+                  </a:lnTo>
+                  <a:lnTo>
+                    <a:pt x="859470" y="279303"/>
+                  </a:lnTo>
+                  <a:lnTo>
+                    <a:pt x="931092" y="276583"/>
+                  </a:lnTo>
+                  <a:lnTo>
+                    <a:pt x="1002715" y="273854"/>
+                  </a:lnTo>
+                  <a:lnTo>
+                    <a:pt x="1074337" y="271113"/>
+                  </a:lnTo>
+                  <a:lnTo>
+                    <a:pt x="1145960" y="268363"/>
+                  </a:lnTo>
+                  <a:lnTo>
+                    <a:pt x="1217582" y="265602"/>
+                  </a:lnTo>
+                  <a:lnTo>
+                    <a:pt x="1289205" y="262831"/>
+                  </a:lnTo>
+                  <a:lnTo>
+                    <a:pt x="1360827" y="260049"/>
+                  </a:lnTo>
+                  <a:lnTo>
+                    <a:pt x="1432450" y="257257"/>
+                  </a:lnTo>
+                  <a:lnTo>
+                    <a:pt x="1504073" y="254454"/>
+                  </a:lnTo>
+                  <a:lnTo>
+                    <a:pt x="1575695" y="251641"/>
+                  </a:lnTo>
+                  <a:lnTo>
+                    <a:pt x="1647318" y="248817"/>
+                  </a:lnTo>
+                  <a:lnTo>
+                    <a:pt x="1718940" y="245983"/>
+                  </a:lnTo>
+                  <a:lnTo>
+                    <a:pt x="1790563" y="243138"/>
+                  </a:lnTo>
+                  <a:lnTo>
+                    <a:pt x="1862185" y="240282"/>
+                  </a:lnTo>
+                  <a:lnTo>
+                    <a:pt x="1933808" y="237415"/>
+                  </a:lnTo>
+                  <a:lnTo>
+                    <a:pt x="2005430" y="234538"/>
+                  </a:lnTo>
+                  <a:lnTo>
+                    <a:pt x="2077053" y="231650"/>
+                  </a:lnTo>
+                  <a:lnTo>
+                    <a:pt x="2148675" y="228751"/>
+                  </a:lnTo>
+                  <a:lnTo>
+                    <a:pt x="2220298" y="225841"/>
+                  </a:lnTo>
+                  <a:lnTo>
+                    <a:pt x="2291920" y="222921"/>
+                  </a:lnTo>
+                  <a:lnTo>
+                    <a:pt x="2363543" y="219989"/>
+                  </a:lnTo>
+                  <a:lnTo>
+                    <a:pt x="2435165" y="217046"/>
+                  </a:lnTo>
+                  <a:lnTo>
+                    <a:pt x="2506788" y="214092"/>
+                  </a:lnTo>
+                  <a:lnTo>
+                    <a:pt x="2578410" y="211127"/>
+                  </a:lnTo>
+                  <a:lnTo>
+                    <a:pt x="2650033" y="208151"/>
+                  </a:lnTo>
+                  <a:lnTo>
+                    <a:pt x="2721655" y="205164"/>
+                  </a:lnTo>
+                  <a:lnTo>
+                    <a:pt x="2793278" y="202165"/>
+                  </a:lnTo>
+                  <a:lnTo>
+                    <a:pt x="2864901" y="199155"/>
+                  </a:lnTo>
+                  <a:lnTo>
+                    <a:pt x="2936523" y="196134"/>
+                  </a:lnTo>
+                  <a:lnTo>
+                    <a:pt x="3008146" y="193101"/>
+                  </a:lnTo>
+                  <a:lnTo>
+                    <a:pt x="3079768" y="190057"/>
+                  </a:lnTo>
+                  <a:lnTo>
+                    <a:pt x="3151391" y="187002"/>
+                  </a:lnTo>
+                  <a:lnTo>
+                    <a:pt x="3223013" y="183935"/>
+                  </a:lnTo>
+                  <a:lnTo>
+                    <a:pt x="3294636" y="180857"/>
+                  </a:lnTo>
+                  <a:lnTo>
+                    <a:pt x="3366258" y="177767"/>
+                  </a:lnTo>
+                  <a:lnTo>
+                    <a:pt x="3437881" y="174665"/>
+                  </a:lnTo>
+                  <a:lnTo>
+                    <a:pt x="3509503" y="171552"/>
+                  </a:lnTo>
+                  <a:lnTo>
+                    <a:pt x="3581126" y="168427"/>
+                  </a:lnTo>
+                  <a:lnTo>
+                    <a:pt x="3652748" y="165290"/>
+                  </a:lnTo>
+                  <a:lnTo>
+                    <a:pt x="3724371" y="162142"/>
+                  </a:lnTo>
+                  <a:lnTo>
+                    <a:pt x="3795993" y="158981"/>
+                  </a:lnTo>
+                  <a:lnTo>
+                    <a:pt x="3867616" y="155809"/>
+                  </a:lnTo>
+                  <a:lnTo>
+                    <a:pt x="3939238" y="152625"/>
+                  </a:lnTo>
+                  <a:lnTo>
+                    <a:pt x="4010861" y="149429"/>
+                  </a:lnTo>
+                  <a:lnTo>
+                    <a:pt x="4082483" y="146221"/>
+                  </a:lnTo>
+                  <a:lnTo>
+                    <a:pt x="4154106" y="143000"/>
+                  </a:lnTo>
+                  <a:lnTo>
+                    <a:pt x="4225729" y="139768"/>
+                  </a:lnTo>
+                  <a:lnTo>
+                    <a:pt x="4297351" y="136523"/>
+                  </a:lnTo>
+                  <a:lnTo>
+                    <a:pt x="4368974" y="133267"/>
+                  </a:lnTo>
+                  <a:lnTo>
+                    <a:pt x="4440596" y="129998"/>
+                  </a:lnTo>
+                  <a:lnTo>
+                    <a:pt x="4512219" y="126716"/>
+                  </a:lnTo>
+                  <a:lnTo>
+                    <a:pt x="4583841" y="123423"/>
+                  </a:lnTo>
+                  <a:lnTo>
+                    <a:pt x="4655464" y="120117"/>
+                  </a:lnTo>
+                  <a:lnTo>
+                    <a:pt x="4727086" y="116798"/>
+                  </a:lnTo>
+                  <a:lnTo>
+                    <a:pt x="4798709" y="113467"/>
+                  </a:lnTo>
+                  <a:lnTo>
+                    <a:pt x="4870331" y="110124"/>
+                  </a:lnTo>
+                  <a:lnTo>
+                    <a:pt x="4941954" y="106768"/>
+                  </a:lnTo>
+                  <a:lnTo>
+                    <a:pt x="5013576" y="103399"/>
+                  </a:lnTo>
+                  <a:lnTo>
+                    <a:pt x="5085199" y="100018"/>
+                  </a:lnTo>
+                  <a:lnTo>
+                    <a:pt x="5156821" y="96624"/>
+                  </a:lnTo>
+                  <a:lnTo>
+                    <a:pt x="5228444" y="93217"/>
+                  </a:lnTo>
+                  <a:lnTo>
+                    <a:pt x="5300066" y="89798"/>
+                  </a:lnTo>
+                  <a:lnTo>
+                    <a:pt x="5371689" y="86365"/>
+                  </a:lnTo>
+                  <a:lnTo>
+                    <a:pt x="5443311" y="82920"/>
+                  </a:lnTo>
+                  <a:lnTo>
+                    <a:pt x="5514934" y="79462"/>
+                  </a:lnTo>
+                  <a:lnTo>
+                    <a:pt x="5586557" y="75990"/>
+                  </a:lnTo>
+                  <a:lnTo>
+                    <a:pt x="5658179" y="72506"/>
+                  </a:lnTo>
+                  <a:lnTo>
+                    <a:pt x="5729802" y="69008"/>
+                  </a:lnTo>
+                  <a:lnTo>
+                    <a:pt x="5801424" y="65498"/>
+                  </a:lnTo>
+                  <a:lnTo>
+                    <a:pt x="5873047" y="61974"/>
+                  </a:lnTo>
+                  <a:lnTo>
+                    <a:pt x="5944669" y="58437"/>
+                  </a:lnTo>
+                  <a:lnTo>
+                    <a:pt x="6016292" y="54886"/>
+                  </a:lnTo>
+                  <a:lnTo>
+                    <a:pt x="6087914" y="51323"/>
+                  </a:lnTo>
+                  <a:lnTo>
+                    <a:pt x="6159537" y="47745"/>
+                  </a:lnTo>
+                  <a:lnTo>
+                    <a:pt x="6231159" y="44155"/>
+                  </a:lnTo>
+                  <a:lnTo>
+                    <a:pt x="6302782" y="40551"/>
+                  </a:lnTo>
+                  <a:lnTo>
+                    <a:pt x="6374404" y="36933"/>
+                  </a:lnTo>
+                  <a:lnTo>
+                    <a:pt x="6446027" y="33302"/>
+                  </a:lnTo>
+                  <a:lnTo>
+                    <a:pt x="6517649" y="29657"/>
+                  </a:lnTo>
+                  <a:lnTo>
+                    <a:pt x="6589272" y="25998"/>
+                  </a:lnTo>
+                  <a:lnTo>
+                    <a:pt x="6660894" y="22326"/>
+                  </a:lnTo>
+                  <a:lnTo>
+                    <a:pt x="6732517" y="18640"/>
+                  </a:lnTo>
+                  <a:lnTo>
+                    <a:pt x="6804139" y="14939"/>
+                  </a:lnTo>
+                  <a:lnTo>
+                    <a:pt x="6875762" y="11226"/>
+                  </a:lnTo>
+                  <a:lnTo>
+                    <a:pt x="6947385" y="7498"/>
+                  </a:lnTo>
+                  <a:lnTo>
+                    <a:pt x="7019007" y="3756"/>
                   </a:lnTo>
                   <a:lnTo>
                     <a:pt x="7090630" y="0"/>
@@ -5002,7 +5002,7 @@
           </p:nvSpPr>
           <p:spPr>
             <a:xfrm>
-              <a:off x="4632789" y="2073503"/>
+              <a:off x="4648520" y="2073503"/>
               <a:ext cx="0" cy="3649639"/>
             </a:xfrm>
             <a:custGeom>
@@ -5045,7 +5045,7 @@
           </p:nvSpPr>
           <p:spPr>
             <a:xfrm>
-              <a:off x="3519238" y="2073503"/>
+              <a:off x="3510041" y="2073503"/>
               <a:ext cx="0" cy="3649639"/>
             </a:xfrm>
             <a:custGeom>
@@ -5088,7 +5088,7 @@
           </p:nvSpPr>
           <p:spPr>
             <a:xfrm>
-              <a:off x="5667105" y="2073503"/>
+              <a:off x="5671562" y="2073503"/>
               <a:ext cx="0" cy="3649639"/>
             </a:xfrm>
             <a:custGeom>
@@ -5361,7 +5361,7 @@
           </p:nvSpPr>
           <p:spPr>
             <a:xfrm>
-              <a:off x="787919" y="5785772"/>
+              <a:off x="789147" y="5785772"/>
               <a:ext cx="161574" cy="80101"/>
             </a:xfrm>
             <a:prstGeom prst="rect">
@@ -5407,7 +5407,7 @@
           </p:nvSpPr>
           <p:spPr>
             <a:xfrm>
-              <a:off x="1701509" y="5785772"/>
+              <a:off x="1701133" y="5785772"/>
               <a:ext cx="161574" cy="80101"/>
             </a:xfrm>
             <a:prstGeom prst="rect">
@@ -5453,7 +5453,7 @@
           </p:nvSpPr>
           <p:spPr>
             <a:xfrm>
-              <a:off x="2615100" y="5785772"/>
+              <a:off x="2613120" y="5785772"/>
               <a:ext cx="161574" cy="80101"/>
             </a:xfrm>
             <a:prstGeom prst="rect">
@@ -5499,7 +5499,7 @@
           </p:nvSpPr>
           <p:spPr>
             <a:xfrm>
-              <a:off x="3528691" y="5785772"/>
+              <a:off x="3525106" y="5785772"/>
               <a:ext cx="161574" cy="80101"/>
             </a:xfrm>
             <a:prstGeom prst="rect">
@@ -5545,7 +5545,7 @@
           </p:nvSpPr>
           <p:spPr>
             <a:xfrm>
-              <a:off x="4442282" y="5785772"/>
+              <a:off x="4437092" y="5785772"/>
               <a:ext cx="161574" cy="80101"/>
             </a:xfrm>
             <a:prstGeom prst="rect">
@@ -5591,7 +5591,7 @@
           </p:nvSpPr>
           <p:spPr>
             <a:xfrm>
-              <a:off x="5405571" y="5785772"/>
+              <a:off x="5398776" y="5785772"/>
               <a:ext cx="62179" cy="80101"/>
             </a:xfrm>
             <a:prstGeom prst="rect">
@@ -5637,7 +5637,7 @@
           </p:nvSpPr>
           <p:spPr>
             <a:xfrm>
-              <a:off x="6288072" y="5785772"/>
+              <a:off x="6279673" y="5785772"/>
               <a:ext cx="124358" cy="80101"/>
             </a:xfrm>
             <a:prstGeom prst="rect">
@@ -5683,7 +5683,7 @@
           </p:nvSpPr>
           <p:spPr>
             <a:xfrm>
-              <a:off x="7201663" y="5785772"/>
+              <a:off x="7191659" y="5785772"/>
               <a:ext cx="124358" cy="80101"/>
             </a:xfrm>
             <a:prstGeom prst="rect">
@@ -5729,7 +5729,7 @@
           </p:nvSpPr>
           <p:spPr>
             <a:xfrm>
-              <a:off x="8115254" y="5785772"/>
+              <a:off x="8103645" y="5785772"/>
               <a:ext cx="124358" cy="80101"/>
             </a:xfrm>
             <a:prstGeom prst="rect">
@@ -5900,7 +5900,7 @@
                   <a:latin typeface="Helvetica"/>
                   <a:cs typeface="Helvetica"/>
                 </a:rPr>
-                <a:t>subHR per 10 % decline: 0.95 (0.65-1.40), p_Bonf = 1.000 (n = 6)  |  per IQR decline (Δ = 23.5 %): 0.90 (0.36-2.22)  |  IQR: [-21.0, 2.5] %</a:t>
+                <a:t>subHR per 10 % decline: 0.95 (0.65-1.40), p_Bonf = 1.000 (n = 6)  |  per IQR decline (Δ = 23.7 %): 0.89 (0.36-2.23)  |  IQR: [-21.1, 2.7] %</a:t>
               </a:r>
             </a:p>
           </p:txBody>
